--- a/slides/4-2_preop_airway_assessment/4-2_preop_airway_assessment.pptx
+++ b/slides/4-2_preop_airway_assessment/4-2_preop_airway_assessment.pptx
@@ -7081,11 +7081,11 @@
             </a:pathLst>
           </a:custGeom>
           <a:solidFill>
-            <a:srgbClr val="F7DFCC"/>
+            <a:srgbClr val="FBE9DF"/>
           </a:solidFill>
           <a:ln w="12700">
             <a:solidFill>
-              <a:srgbClr val="F7DFCC"/>
+              <a:srgbClr val="FBE9DF"/>
             </a:solidFill>
             <a:prstDash val="solid"/>
           </a:ln>
@@ -7099,8 +7099,8 @@
         </p:nvSpPr>
         <p:spPr>
           <a:xfrm>
-            <a:off x="1570939" y="1953158"/>
-            <a:ext cx="641909" cy="967435"/>
+            <a:off x="1452067" y="1953158"/>
+            <a:ext cx="879653" cy="863194"/>
           </a:xfrm>
           <a:custGeom>
             <a:avLst/>
@@ -7109,87 +7109,202 @@
             <a:cxnLst/>
             <a:rect l="l" t="t" r="r" b="b"/>
             <a:pathLst>
-              <a:path w="641909" h="967435">
+              <a:path w="879653" h="863194">
                 <a:moveTo>
-                  <a:pt x="0" y="967435"/>
+                  <a:pt x="0" y="863194"/>
                 </a:moveTo>
                 <a:lnTo>
-                  <a:pt x="0" y="470916"/>
-                </a:lnTo>
-                <a:lnTo>
-                  <a:pt x="2743" y="409651"/>
-                </a:lnTo>
-                <a:lnTo>
-                  <a:pt x="10973" y="349301"/>
-                </a:lnTo>
-                <a:lnTo>
-                  <a:pt x="24689" y="290779"/>
-                </a:lnTo>
-                <a:lnTo>
-                  <a:pt x="42977" y="235001"/>
-                </a:lnTo>
-                <a:lnTo>
-                  <a:pt x="66751" y="183794"/>
-                </a:lnTo>
-                <a:lnTo>
-                  <a:pt x="94183" y="138074"/>
-                </a:lnTo>
-                <a:lnTo>
-                  <a:pt x="125273" y="96926"/>
-                </a:lnTo>
-                <a:lnTo>
-                  <a:pt x="160934" y="63094"/>
-                </a:lnTo>
-                <a:lnTo>
-                  <a:pt x="198425" y="35662"/>
-                </a:lnTo>
-                <a:lnTo>
-                  <a:pt x="237744" y="16459"/>
-                </a:lnTo>
-                <a:lnTo>
-                  <a:pt x="278892" y="3658"/>
+                  <a:pt x="0" y="549554"/>
+                </a:lnTo>
+                <a:lnTo>
+                  <a:pt x="3658" y="477317"/>
+                </a:lnTo>
+                <a:lnTo>
+                  <a:pt x="14630" y="406908"/>
+                </a:lnTo>
+                <a:lnTo>
+                  <a:pt x="33833" y="339242"/>
+                </a:lnTo>
+                <a:lnTo>
+                  <a:pt x="58522" y="274320"/>
+                </a:lnTo>
+                <a:lnTo>
+                  <a:pt x="90526" y="214884"/>
+                </a:lnTo>
+                <a:lnTo>
+                  <a:pt x="128930" y="160934"/>
+                </a:lnTo>
+                <a:lnTo>
+                  <a:pt x="171907" y="113386"/>
+                </a:lnTo>
+                <a:lnTo>
+                  <a:pt x="219456" y="73152"/>
+                </a:lnTo>
+                <a:lnTo>
+                  <a:pt x="271577" y="42062"/>
+                </a:lnTo>
+                <a:lnTo>
+                  <a:pt x="326441" y="18288"/>
+                </a:lnTo>
+                <a:lnTo>
+                  <a:pt x="382219" y="4572"/>
+                </a:lnTo>
+                <a:lnTo>
+                  <a:pt x="439826" y="0"/>
+                </a:lnTo>
+                <a:lnTo>
+                  <a:pt x="497434" y="4572"/>
+                </a:lnTo>
+                <a:lnTo>
+                  <a:pt x="553212" y="18288"/>
+                </a:lnTo>
+                <a:lnTo>
+                  <a:pt x="608076" y="42062"/>
+                </a:lnTo>
+                <a:lnTo>
+                  <a:pt x="660197" y="73152"/>
+                </a:lnTo>
+                <a:lnTo>
+                  <a:pt x="707746" y="113386"/>
+                </a:lnTo>
+                <a:lnTo>
+                  <a:pt x="750722" y="160934"/>
+                </a:lnTo>
+                <a:lnTo>
+                  <a:pt x="789127" y="214884"/>
+                </a:lnTo>
+                <a:lnTo>
+                  <a:pt x="821131" y="274320"/>
+                </a:lnTo>
+                <a:lnTo>
+                  <a:pt x="845820" y="339242"/>
+                </a:lnTo>
+                <a:lnTo>
+                  <a:pt x="865022" y="406908"/>
+                </a:lnTo>
+                <a:lnTo>
+                  <a:pt x="875995" y="477317"/>
+                </a:lnTo>
+                <a:lnTo>
+                  <a:pt x="879653" y="549554"/>
+                </a:lnTo>
+                <a:lnTo>
+                  <a:pt x="879653" y="863194"/>
+                </a:lnTo>
+                <a:close/>
+              </a:path>
+            </a:pathLst>
+          </a:custGeom>
+          <a:solidFill>
+            <a:srgbClr val="F2C4B0"/>
+          </a:solidFill>
+          <a:ln w="12700">
+            <a:solidFill>
+              <a:srgbClr val="F2C4B0"/>
+            </a:solidFill>
+            <a:prstDash val="solid"/>
+          </a:ln>
+        </p:spPr>
+      </p:sp>
+      <p:sp>
+        <p:nvSpPr>
+          <p:cNvPr id="13" name="Shape 11"/>
+          <p:cNvSpPr/>
+          <p:nvPr/>
+        </p:nvSpPr>
+        <p:spPr>
+          <a:xfrm>
+            <a:off x="1570939" y="2123237"/>
+            <a:ext cx="641909" cy="693115"/>
+          </a:xfrm>
+          <a:custGeom>
+            <a:avLst/>
+            <a:gdLst/>
+            <a:ahLst/>
+            <a:cxnLst/>
+            <a:rect l="l" t="t" r="r" b="b"/>
+            <a:pathLst>
+              <a:path w="641909" h="693115">
+                <a:moveTo>
+                  <a:pt x="0" y="693115"/>
+                </a:moveTo>
+                <a:lnTo>
+                  <a:pt x="0" y="379476"/>
+                </a:lnTo>
+                <a:lnTo>
+                  <a:pt x="2743" y="329184"/>
+                </a:lnTo>
+                <a:lnTo>
+                  <a:pt x="10973" y="280721"/>
+                </a:lnTo>
+                <a:lnTo>
+                  <a:pt x="24689" y="234086"/>
+                </a:lnTo>
+                <a:lnTo>
+                  <a:pt x="42977" y="189281"/>
+                </a:lnTo>
+                <a:lnTo>
+                  <a:pt x="66751" y="148133"/>
+                </a:lnTo>
+                <a:lnTo>
+                  <a:pt x="94183" y="110642"/>
+                </a:lnTo>
+                <a:lnTo>
+                  <a:pt x="125273" y="78638"/>
+                </a:lnTo>
+                <a:lnTo>
+                  <a:pt x="160934" y="50292"/>
+                </a:lnTo>
+                <a:lnTo>
+                  <a:pt x="198425" y="28346"/>
+                </a:lnTo>
+                <a:lnTo>
+                  <a:pt x="237744" y="12802"/>
+                </a:lnTo>
+                <a:lnTo>
+                  <a:pt x="278892" y="2743"/>
                 </a:lnTo>
                 <a:lnTo>
                   <a:pt x="320954" y="0"/>
                 </a:lnTo>
                 <a:lnTo>
-                  <a:pt x="363017" y="3658"/>
-                </a:lnTo>
-                <a:lnTo>
-                  <a:pt x="404165" y="16459"/>
-                </a:lnTo>
-                <a:lnTo>
-                  <a:pt x="443484" y="35662"/>
-                </a:lnTo>
-                <a:lnTo>
-                  <a:pt x="481889" y="63094"/>
-                </a:lnTo>
-                <a:lnTo>
-                  <a:pt x="516636" y="96926"/>
-                </a:lnTo>
-                <a:lnTo>
-                  <a:pt x="547726" y="138074"/>
-                </a:lnTo>
-                <a:lnTo>
-                  <a:pt x="575158" y="183794"/>
-                </a:lnTo>
-                <a:lnTo>
-                  <a:pt x="598932" y="235001"/>
-                </a:lnTo>
-                <a:lnTo>
-                  <a:pt x="617220" y="290779"/>
-                </a:lnTo>
-                <a:lnTo>
-                  <a:pt x="630936" y="349301"/>
-                </a:lnTo>
-                <a:lnTo>
-                  <a:pt x="639166" y="409651"/>
-                </a:lnTo>
-                <a:lnTo>
-                  <a:pt x="641909" y="470916"/>
-                </a:lnTo>
-                <a:lnTo>
-                  <a:pt x="641909" y="967435"/>
+                  <a:pt x="363017" y="2743"/>
+                </a:lnTo>
+                <a:lnTo>
+                  <a:pt x="404165" y="12802"/>
+                </a:lnTo>
+                <a:lnTo>
+                  <a:pt x="443484" y="28346"/>
+                </a:lnTo>
+                <a:lnTo>
+                  <a:pt x="481889" y="50292"/>
+                </a:lnTo>
+                <a:lnTo>
+                  <a:pt x="516636" y="78638"/>
+                </a:lnTo>
+                <a:lnTo>
+                  <a:pt x="547726" y="110642"/>
+                </a:lnTo>
+                <a:lnTo>
+                  <a:pt x="575158" y="148133"/>
+                </a:lnTo>
+                <a:lnTo>
+                  <a:pt x="598932" y="189281"/>
+                </a:lnTo>
+                <a:lnTo>
+                  <a:pt x="617220" y="234086"/>
+                </a:lnTo>
+                <a:lnTo>
+                  <a:pt x="630936" y="280721"/>
+                </a:lnTo>
+                <a:lnTo>
+                  <a:pt x="639166" y="329184"/>
+                </a:lnTo>
+                <a:lnTo>
+                  <a:pt x="641909" y="379476"/>
+                </a:lnTo>
+                <a:lnTo>
+                  <a:pt x="641909" y="693115"/>
                 </a:lnTo>
                 <a:close/>
               </a:path>
@@ -7208,14 +7323,14 @@
       </p:sp>
       <p:sp>
         <p:nvSpPr>
-          <p:cNvPr id="13" name="Shape 11"/>
+          <p:cNvPr id="14" name="Shape 12"/>
           <p:cNvSpPr/>
           <p:nvPr/>
         </p:nvSpPr>
         <p:spPr>
           <a:xfrm>
-            <a:off x="1809598" y="1944014"/>
-            <a:ext cx="164592" cy="322783"/>
+            <a:off x="1800454" y="2114093"/>
+            <a:ext cx="182880" cy="231343"/>
           </a:xfrm>
           <a:custGeom>
             <a:avLst/>
@@ -7224,58 +7339,58 @@
             <a:cxnLst/>
             <a:rect l="l" t="t" r="r" b="b"/>
             <a:pathLst>
-              <a:path w="164592" h="322783">
+              <a:path w="182880" h="231343">
                 <a:moveTo>
                   <a:pt x="0" y="0"/>
                 </a:moveTo>
                 <a:lnTo>
-                  <a:pt x="22860" y="263347"/>
-                </a:lnTo>
-                <a:lnTo>
-                  <a:pt x="24689" y="278892"/>
-                </a:lnTo>
-                <a:lnTo>
-                  <a:pt x="31090" y="293522"/>
-                </a:lnTo>
-                <a:lnTo>
-                  <a:pt x="40234" y="305410"/>
-                </a:lnTo>
-                <a:lnTo>
-                  <a:pt x="52121" y="314554"/>
-                </a:lnTo>
-                <a:lnTo>
-                  <a:pt x="66751" y="320954"/>
-                </a:lnTo>
-                <a:lnTo>
-                  <a:pt x="82296" y="322783"/>
-                </a:lnTo>
-                <a:lnTo>
-                  <a:pt x="97841" y="320954"/>
-                </a:lnTo>
-                <a:lnTo>
-                  <a:pt x="112471" y="314554"/>
-                </a:lnTo>
-                <a:lnTo>
-                  <a:pt x="124358" y="305410"/>
-                </a:lnTo>
-                <a:lnTo>
-                  <a:pt x="133502" y="293522"/>
-                </a:lnTo>
-                <a:lnTo>
-                  <a:pt x="139903" y="278892"/>
-                </a:lnTo>
-                <a:lnTo>
-                  <a:pt x="141732" y="263347"/>
-                </a:lnTo>
-                <a:lnTo>
-                  <a:pt x="164592" y="0"/>
+                  <a:pt x="22860" y="162763"/>
+                </a:lnTo>
+                <a:lnTo>
+                  <a:pt x="25603" y="180137"/>
+                </a:lnTo>
+                <a:lnTo>
+                  <a:pt x="32004" y="197510"/>
+                </a:lnTo>
+                <a:lnTo>
+                  <a:pt x="42977" y="211226"/>
+                </a:lnTo>
+                <a:lnTo>
+                  <a:pt x="56693" y="222199"/>
+                </a:lnTo>
+                <a:lnTo>
+                  <a:pt x="74066" y="228600"/>
+                </a:lnTo>
+                <a:lnTo>
+                  <a:pt x="91440" y="231343"/>
+                </a:lnTo>
+                <a:lnTo>
+                  <a:pt x="108814" y="228600"/>
+                </a:lnTo>
+                <a:lnTo>
+                  <a:pt x="126187" y="222199"/>
+                </a:lnTo>
+                <a:lnTo>
+                  <a:pt x="139903" y="211226"/>
+                </a:lnTo>
+                <a:lnTo>
+                  <a:pt x="150876" y="197510"/>
+                </a:lnTo>
+                <a:lnTo>
+                  <a:pt x="157277" y="180137"/>
+                </a:lnTo>
+                <a:lnTo>
+                  <a:pt x="160020" y="162763"/>
+                </a:lnTo>
+                <a:lnTo>
+                  <a:pt x="182880" y="0"/>
                 </a:lnTo>
                 <a:close/>
               </a:path>
             </a:pathLst>
           </a:custGeom>
           <a:solidFill>
-            <a:srgbClr val="F7DFCC"/>
+            <a:srgbClr val="F2C4B0"/>
           </a:solidFill>
           <a:ln w="25400">
             <a:solidFill>
@@ -7287,7 +7402,7 @@
       </p:sp>
       <p:sp>
         <p:nvSpPr>
-          <p:cNvPr id="14" name="Shape 12"/>
+          <p:cNvPr id="15" name="Shape 13"/>
           <p:cNvSpPr/>
           <p:nvPr/>
         </p:nvSpPr>
@@ -7501,7 +7616,7 @@
       </p:sp>
       <p:sp>
         <p:nvSpPr>
-          <p:cNvPr id="15" name="Shape 13"/>
+          <p:cNvPr id="16" name="Shape 14"/>
           <p:cNvSpPr/>
           <p:nvPr/>
         </p:nvSpPr>
@@ -7749,7 +7864,7 @@
       </p:sp>
       <p:sp>
         <p:nvSpPr>
-          <p:cNvPr id="16" name="Shape 14"/>
+          <p:cNvPr id="17" name="Shape 15"/>
           <p:cNvSpPr/>
           <p:nvPr/>
         </p:nvSpPr>
@@ -7771,7 +7886,7 @@
       </p:sp>
       <p:sp>
         <p:nvSpPr>
-          <p:cNvPr id="17" name="Text 15"/>
+          <p:cNvPr id="18" name="Text 16"/>
           <p:cNvSpPr txBox="1"/>
           <p:nvPr/>
         </p:nvSpPr>
@@ -7810,7 +7925,7 @@
       </p:sp>
       <p:sp>
         <p:nvSpPr>
-          <p:cNvPr id="18" name="Text 16"/>
+          <p:cNvPr id="19" name="Text 17"/>
           <p:cNvSpPr txBox="1"/>
           <p:nvPr/>
         </p:nvSpPr>
@@ -7892,7 +8007,7 @@
       </p:sp>
       <p:sp>
         <p:nvSpPr>
-          <p:cNvPr id="19" name="Shape 17"/>
+          <p:cNvPr id="20" name="Shape 18"/>
           <p:cNvSpPr/>
           <p:nvPr/>
         </p:nvSpPr>
@@ -8130,11 +8245,11 @@
             </a:pathLst>
           </a:custGeom>
           <a:solidFill>
-            <a:srgbClr val="F7DFCC"/>
+            <a:srgbClr val="FBE9DF"/>
           </a:solidFill>
           <a:ln w="12700">
             <a:solidFill>
-              <a:srgbClr val="F7DFCC"/>
+              <a:srgbClr val="FBE9DF"/>
             </a:solidFill>
             <a:prstDash val="solid"/>
           </a:ln>
@@ -8142,14 +8257,14 @@
       </p:sp>
       <p:sp>
         <p:nvSpPr>
-          <p:cNvPr id="20" name="Shape 18"/>
+          <p:cNvPr id="21" name="Shape 19"/>
           <p:cNvSpPr/>
           <p:nvPr/>
         </p:nvSpPr>
         <p:spPr>
           <a:xfrm>
-            <a:off x="4568342" y="1953158"/>
-            <a:ext cx="641909" cy="967435"/>
+            <a:off x="4449470" y="1953158"/>
+            <a:ext cx="879653" cy="863194"/>
           </a:xfrm>
           <a:custGeom>
             <a:avLst/>
@@ -8158,87 +8273,202 @@
             <a:cxnLst/>
             <a:rect l="l" t="t" r="r" b="b"/>
             <a:pathLst>
-              <a:path w="641909" h="967435">
+              <a:path w="879653" h="863194">
                 <a:moveTo>
-                  <a:pt x="0" y="967435"/>
+                  <a:pt x="0" y="863194"/>
                 </a:moveTo>
                 <a:lnTo>
-                  <a:pt x="0" y="470916"/>
-                </a:lnTo>
-                <a:lnTo>
-                  <a:pt x="2743" y="409651"/>
-                </a:lnTo>
-                <a:lnTo>
-                  <a:pt x="10973" y="349301"/>
-                </a:lnTo>
-                <a:lnTo>
-                  <a:pt x="24689" y="290779"/>
-                </a:lnTo>
-                <a:lnTo>
-                  <a:pt x="42977" y="235001"/>
-                </a:lnTo>
-                <a:lnTo>
-                  <a:pt x="66751" y="183794"/>
-                </a:lnTo>
-                <a:lnTo>
-                  <a:pt x="94183" y="138074"/>
-                </a:lnTo>
-                <a:lnTo>
-                  <a:pt x="125273" y="96926"/>
-                </a:lnTo>
-                <a:lnTo>
-                  <a:pt x="160934" y="63094"/>
-                </a:lnTo>
-                <a:lnTo>
-                  <a:pt x="198425" y="35662"/>
-                </a:lnTo>
-                <a:lnTo>
-                  <a:pt x="237744" y="16459"/>
-                </a:lnTo>
-                <a:lnTo>
-                  <a:pt x="278892" y="3658"/>
+                  <a:pt x="0" y="549554"/>
+                </a:lnTo>
+                <a:lnTo>
+                  <a:pt x="3658" y="477317"/>
+                </a:lnTo>
+                <a:lnTo>
+                  <a:pt x="14630" y="406908"/>
+                </a:lnTo>
+                <a:lnTo>
+                  <a:pt x="33833" y="339242"/>
+                </a:lnTo>
+                <a:lnTo>
+                  <a:pt x="58522" y="274320"/>
+                </a:lnTo>
+                <a:lnTo>
+                  <a:pt x="90526" y="214884"/>
+                </a:lnTo>
+                <a:lnTo>
+                  <a:pt x="128930" y="160934"/>
+                </a:lnTo>
+                <a:lnTo>
+                  <a:pt x="171907" y="113386"/>
+                </a:lnTo>
+                <a:lnTo>
+                  <a:pt x="220370" y="73152"/>
+                </a:lnTo>
+                <a:lnTo>
+                  <a:pt x="271577" y="42062"/>
+                </a:lnTo>
+                <a:lnTo>
+                  <a:pt x="326441" y="18288"/>
+                </a:lnTo>
+                <a:lnTo>
+                  <a:pt x="382219" y="4572"/>
+                </a:lnTo>
+                <a:lnTo>
+                  <a:pt x="439826" y="0"/>
+                </a:lnTo>
+                <a:lnTo>
+                  <a:pt x="497434" y="4572"/>
+                </a:lnTo>
+                <a:lnTo>
+                  <a:pt x="553212" y="18288"/>
+                </a:lnTo>
+                <a:lnTo>
+                  <a:pt x="608076" y="42062"/>
+                </a:lnTo>
+                <a:lnTo>
+                  <a:pt x="660197" y="73152"/>
+                </a:lnTo>
+                <a:lnTo>
+                  <a:pt x="707746" y="113386"/>
+                </a:lnTo>
+                <a:lnTo>
+                  <a:pt x="750722" y="160934"/>
+                </a:lnTo>
+                <a:lnTo>
+                  <a:pt x="789127" y="214884"/>
+                </a:lnTo>
+                <a:lnTo>
+                  <a:pt x="821131" y="274320"/>
+                </a:lnTo>
+                <a:lnTo>
+                  <a:pt x="845820" y="339242"/>
+                </a:lnTo>
+                <a:lnTo>
+                  <a:pt x="865022" y="406908"/>
+                </a:lnTo>
+                <a:lnTo>
+                  <a:pt x="875995" y="477317"/>
+                </a:lnTo>
+                <a:lnTo>
+                  <a:pt x="879653" y="549554"/>
+                </a:lnTo>
+                <a:lnTo>
+                  <a:pt x="879653" y="863194"/>
+                </a:lnTo>
+                <a:close/>
+              </a:path>
+            </a:pathLst>
+          </a:custGeom>
+          <a:solidFill>
+            <a:srgbClr val="F2C4B0"/>
+          </a:solidFill>
+          <a:ln w="12700">
+            <a:solidFill>
+              <a:srgbClr val="F2C4B0"/>
+            </a:solidFill>
+            <a:prstDash val="solid"/>
+          </a:ln>
+        </p:spPr>
+      </p:sp>
+      <p:sp>
+        <p:nvSpPr>
+          <p:cNvPr id="22" name="Shape 20"/>
+          <p:cNvSpPr/>
+          <p:nvPr/>
+        </p:nvSpPr>
+        <p:spPr>
+          <a:xfrm>
+            <a:off x="4568342" y="2123237"/>
+            <a:ext cx="641909" cy="693115"/>
+          </a:xfrm>
+          <a:custGeom>
+            <a:avLst/>
+            <a:gdLst/>
+            <a:ahLst/>
+            <a:cxnLst/>
+            <a:rect l="l" t="t" r="r" b="b"/>
+            <a:pathLst>
+              <a:path w="641909" h="693115">
+                <a:moveTo>
+                  <a:pt x="0" y="693115"/>
+                </a:moveTo>
+                <a:lnTo>
+                  <a:pt x="0" y="379476"/>
+                </a:lnTo>
+                <a:lnTo>
+                  <a:pt x="2743" y="329184"/>
+                </a:lnTo>
+                <a:lnTo>
+                  <a:pt x="10973" y="280721"/>
+                </a:lnTo>
+                <a:lnTo>
+                  <a:pt x="24689" y="234086"/>
+                </a:lnTo>
+                <a:lnTo>
+                  <a:pt x="42977" y="189281"/>
+                </a:lnTo>
+                <a:lnTo>
+                  <a:pt x="66751" y="148133"/>
+                </a:lnTo>
+                <a:lnTo>
+                  <a:pt x="94183" y="110642"/>
+                </a:lnTo>
+                <a:lnTo>
+                  <a:pt x="125273" y="78638"/>
+                </a:lnTo>
+                <a:lnTo>
+                  <a:pt x="160934" y="50292"/>
+                </a:lnTo>
+                <a:lnTo>
+                  <a:pt x="198425" y="28346"/>
+                </a:lnTo>
+                <a:lnTo>
+                  <a:pt x="237744" y="12802"/>
+                </a:lnTo>
+                <a:lnTo>
+                  <a:pt x="278892" y="2743"/>
                 </a:lnTo>
                 <a:lnTo>
                   <a:pt x="320954" y="0"/>
                 </a:lnTo>
                 <a:lnTo>
-                  <a:pt x="363017" y="3658"/>
-                </a:lnTo>
-                <a:lnTo>
-                  <a:pt x="404165" y="16459"/>
-                </a:lnTo>
-                <a:lnTo>
-                  <a:pt x="443484" y="35662"/>
-                </a:lnTo>
-                <a:lnTo>
-                  <a:pt x="481889" y="63094"/>
-                </a:lnTo>
-                <a:lnTo>
-                  <a:pt x="516636" y="96926"/>
-                </a:lnTo>
-                <a:lnTo>
-                  <a:pt x="547726" y="138074"/>
-                </a:lnTo>
-                <a:lnTo>
-                  <a:pt x="575158" y="183794"/>
-                </a:lnTo>
-                <a:lnTo>
-                  <a:pt x="598932" y="235001"/>
-                </a:lnTo>
-                <a:lnTo>
-                  <a:pt x="617220" y="290779"/>
-                </a:lnTo>
-                <a:lnTo>
-                  <a:pt x="630936" y="349301"/>
-                </a:lnTo>
-                <a:lnTo>
-                  <a:pt x="639166" y="409651"/>
-                </a:lnTo>
-                <a:lnTo>
-                  <a:pt x="641909" y="470916"/>
-                </a:lnTo>
-                <a:lnTo>
-                  <a:pt x="641909" y="967435"/>
+                  <a:pt x="363017" y="2743"/>
+                </a:lnTo>
+                <a:lnTo>
+                  <a:pt x="404165" y="12802"/>
+                </a:lnTo>
+                <a:lnTo>
+                  <a:pt x="443484" y="28346"/>
+                </a:lnTo>
+                <a:lnTo>
+                  <a:pt x="481889" y="50292"/>
+                </a:lnTo>
+                <a:lnTo>
+                  <a:pt x="516636" y="78638"/>
+                </a:lnTo>
+                <a:lnTo>
+                  <a:pt x="547726" y="110642"/>
+                </a:lnTo>
+                <a:lnTo>
+                  <a:pt x="575158" y="148133"/>
+                </a:lnTo>
+                <a:lnTo>
+                  <a:pt x="598932" y="189281"/>
+                </a:lnTo>
+                <a:lnTo>
+                  <a:pt x="617220" y="234086"/>
+                </a:lnTo>
+                <a:lnTo>
+                  <a:pt x="630936" y="280721"/>
+                </a:lnTo>
+                <a:lnTo>
+                  <a:pt x="639166" y="329184"/>
+                </a:lnTo>
+                <a:lnTo>
+                  <a:pt x="641909" y="379476"/>
+                </a:lnTo>
+                <a:lnTo>
+                  <a:pt x="641909" y="693115"/>
                 </a:lnTo>
                 <a:close/>
               </a:path>
@@ -8257,14 +8487,14 @@
       </p:sp>
       <p:sp>
         <p:nvSpPr>
-          <p:cNvPr id="21" name="Shape 19"/>
+          <p:cNvPr id="23" name="Shape 21"/>
           <p:cNvSpPr/>
           <p:nvPr/>
         </p:nvSpPr>
         <p:spPr>
           <a:xfrm>
-            <a:off x="4807001" y="1944014"/>
-            <a:ext cx="164592" cy="322783"/>
+            <a:off x="4797857" y="2114093"/>
+            <a:ext cx="182880" cy="231343"/>
           </a:xfrm>
           <a:custGeom>
             <a:avLst/>
@@ -8273,58 +8503,58 @@
             <a:cxnLst/>
             <a:rect l="l" t="t" r="r" b="b"/>
             <a:pathLst>
-              <a:path w="164592" h="322783">
+              <a:path w="182880" h="231343">
                 <a:moveTo>
                   <a:pt x="0" y="0"/>
                 </a:moveTo>
                 <a:lnTo>
-                  <a:pt x="22860" y="263347"/>
-                </a:lnTo>
-                <a:lnTo>
-                  <a:pt x="24689" y="278892"/>
-                </a:lnTo>
-                <a:lnTo>
-                  <a:pt x="31090" y="293522"/>
-                </a:lnTo>
-                <a:lnTo>
-                  <a:pt x="40234" y="305410"/>
-                </a:lnTo>
-                <a:lnTo>
-                  <a:pt x="53035" y="314554"/>
-                </a:lnTo>
-                <a:lnTo>
-                  <a:pt x="66751" y="320954"/>
-                </a:lnTo>
-                <a:lnTo>
-                  <a:pt x="82296" y="322783"/>
-                </a:lnTo>
-                <a:lnTo>
-                  <a:pt x="97841" y="320954"/>
-                </a:lnTo>
-                <a:lnTo>
-                  <a:pt x="112471" y="314554"/>
-                </a:lnTo>
-                <a:lnTo>
-                  <a:pt x="124358" y="305410"/>
-                </a:lnTo>
-                <a:lnTo>
-                  <a:pt x="133502" y="293522"/>
-                </a:lnTo>
-                <a:lnTo>
-                  <a:pt x="139903" y="278892"/>
-                </a:lnTo>
-                <a:lnTo>
-                  <a:pt x="141732" y="263347"/>
-                </a:lnTo>
-                <a:lnTo>
-                  <a:pt x="164592" y="0"/>
+                  <a:pt x="22860" y="162763"/>
+                </a:lnTo>
+                <a:lnTo>
+                  <a:pt x="25603" y="180137"/>
+                </a:lnTo>
+                <a:lnTo>
+                  <a:pt x="32004" y="197510"/>
+                </a:lnTo>
+                <a:lnTo>
+                  <a:pt x="42977" y="211226"/>
+                </a:lnTo>
+                <a:lnTo>
+                  <a:pt x="57607" y="222199"/>
+                </a:lnTo>
+                <a:lnTo>
+                  <a:pt x="74066" y="228600"/>
+                </a:lnTo>
+                <a:lnTo>
+                  <a:pt x="91440" y="231343"/>
+                </a:lnTo>
+                <a:lnTo>
+                  <a:pt x="108814" y="228600"/>
+                </a:lnTo>
+                <a:lnTo>
+                  <a:pt x="126187" y="222199"/>
+                </a:lnTo>
+                <a:lnTo>
+                  <a:pt x="139903" y="211226"/>
+                </a:lnTo>
+                <a:lnTo>
+                  <a:pt x="150876" y="197510"/>
+                </a:lnTo>
+                <a:lnTo>
+                  <a:pt x="157277" y="180137"/>
+                </a:lnTo>
+                <a:lnTo>
+                  <a:pt x="160020" y="162763"/>
+                </a:lnTo>
+                <a:lnTo>
+                  <a:pt x="182880" y="0"/>
                 </a:lnTo>
                 <a:close/>
               </a:path>
             </a:pathLst>
           </a:custGeom>
           <a:solidFill>
-            <a:srgbClr val="F7DFCC"/>
+            <a:srgbClr val="F2C4B0"/>
           </a:solidFill>
           <a:ln w="25400">
             <a:solidFill>
@@ -8336,14 +8566,14 @@
       </p:sp>
       <p:sp>
         <p:nvSpPr>
-          <p:cNvPr id="22" name="Shape 20"/>
+          <p:cNvPr id="24" name="Shape 22"/>
           <p:cNvSpPr/>
           <p:nvPr/>
         </p:nvSpPr>
         <p:spPr>
           <a:xfrm>
-            <a:off x="4002329" y="2374697"/>
-            <a:ext cx="1773936" cy="624535"/>
+            <a:off x="4016045" y="2439619"/>
+            <a:ext cx="1746504" cy="559613"/>
           </a:xfrm>
           <a:custGeom>
             <a:avLst/>
@@ -8352,186 +8582,186 @@
             <a:cxnLst/>
             <a:rect l="l" t="t" r="r" b="b"/>
             <a:pathLst>
-              <a:path w="1773936" h="624535">
+              <a:path w="1746504" h="559613">
                 <a:moveTo>
                   <a:pt x="0" y="36576"/>
                 </a:moveTo>
                 <a:lnTo>
-                  <a:pt x="74066" y="30175"/>
-                </a:lnTo>
-                <a:lnTo>
-                  <a:pt x="148133" y="24689"/>
-                </a:lnTo>
-                <a:lnTo>
-                  <a:pt x="221285" y="20117"/>
-                </a:lnTo>
-                <a:lnTo>
-                  <a:pt x="295351" y="15545"/>
-                </a:lnTo>
-                <a:lnTo>
-                  <a:pt x="369418" y="11887"/>
-                </a:lnTo>
-                <a:lnTo>
-                  <a:pt x="443484" y="9144"/>
-                </a:lnTo>
-                <a:lnTo>
-                  <a:pt x="517550" y="5486"/>
-                </a:lnTo>
-                <a:lnTo>
-                  <a:pt x="591617" y="3658"/>
-                </a:lnTo>
-                <a:lnTo>
-                  <a:pt x="664769" y="1829"/>
-                </a:lnTo>
-                <a:lnTo>
-                  <a:pt x="738835" y="914"/>
-                </a:lnTo>
-                <a:lnTo>
-                  <a:pt x="812902" y="0"/>
-                </a:lnTo>
-                <a:lnTo>
-                  <a:pt x="886968" y="0"/>
-                </a:lnTo>
-                <a:lnTo>
-                  <a:pt x="961034" y="0"/>
-                </a:lnTo>
-                <a:lnTo>
-                  <a:pt x="1035101" y="914"/>
-                </a:lnTo>
-                <a:lnTo>
-                  <a:pt x="1109167" y="1829"/>
-                </a:lnTo>
-                <a:lnTo>
-                  <a:pt x="1182319" y="3658"/>
-                </a:lnTo>
-                <a:lnTo>
-                  <a:pt x="1256386" y="5486"/>
-                </a:lnTo>
-                <a:lnTo>
-                  <a:pt x="1330452" y="9144"/>
-                </a:lnTo>
-                <a:lnTo>
-                  <a:pt x="1404518" y="11887"/>
-                </a:lnTo>
-                <a:lnTo>
-                  <a:pt x="1478585" y="15545"/>
-                </a:lnTo>
-                <a:lnTo>
-                  <a:pt x="1552651" y="20117"/>
-                </a:lnTo>
-                <a:lnTo>
-                  <a:pt x="1625803" y="24689"/>
-                </a:lnTo>
-                <a:lnTo>
-                  <a:pt x="1699870" y="30175"/>
-                </a:lnTo>
-                <a:lnTo>
-                  <a:pt x="1773936" y="36576"/>
-                </a:lnTo>
-                <a:lnTo>
-                  <a:pt x="1763878" y="88697"/>
-                </a:lnTo>
-                <a:lnTo>
-                  <a:pt x="1747418" y="140818"/>
-                </a:lnTo>
-                <a:lnTo>
-                  <a:pt x="1725473" y="192024"/>
-                </a:lnTo>
-                <a:lnTo>
-                  <a:pt x="1698041" y="241402"/>
-                </a:lnTo>
-                <a:lnTo>
-                  <a:pt x="1666037" y="288950"/>
-                </a:lnTo>
-                <a:lnTo>
-                  <a:pt x="1627632" y="334670"/>
-                </a:lnTo>
-                <a:lnTo>
-                  <a:pt x="1584655" y="377647"/>
-                </a:lnTo>
-                <a:lnTo>
-                  <a:pt x="1537106" y="417881"/>
-                </a:lnTo>
-                <a:lnTo>
-                  <a:pt x="1484986" y="455371"/>
-                </a:lnTo>
-                <a:lnTo>
-                  <a:pt x="1429207" y="490118"/>
-                </a:lnTo>
-                <a:lnTo>
-                  <a:pt x="1369771" y="520294"/>
-                </a:lnTo>
-                <a:lnTo>
-                  <a:pt x="1306678" y="547726"/>
-                </a:lnTo>
-                <a:lnTo>
-                  <a:pt x="1240841" y="570586"/>
-                </a:lnTo>
-                <a:lnTo>
-                  <a:pt x="1173175" y="589788"/>
-                </a:lnTo>
-                <a:lnTo>
-                  <a:pt x="1103681" y="605333"/>
-                </a:lnTo>
-                <a:lnTo>
-                  <a:pt x="1032358" y="615391"/>
-                </a:lnTo>
-                <a:lnTo>
-                  <a:pt x="960120" y="622706"/>
-                </a:lnTo>
-                <a:lnTo>
-                  <a:pt x="886968" y="624535"/>
-                </a:lnTo>
-                <a:lnTo>
-                  <a:pt x="813816" y="622706"/>
-                </a:lnTo>
-                <a:lnTo>
-                  <a:pt x="741578" y="615391"/>
-                </a:lnTo>
-                <a:lnTo>
-                  <a:pt x="670255" y="605333"/>
-                </a:lnTo>
-                <a:lnTo>
-                  <a:pt x="600761" y="589788"/>
-                </a:lnTo>
-                <a:lnTo>
-                  <a:pt x="533095" y="570586"/>
-                </a:lnTo>
-                <a:lnTo>
-                  <a:pt x="467258" y="547726"/>
-                </a:lnTo>
-                <a:lnTo>
-                  <a:pt x="404165" y="520294"/>
-                </a:lnTo>
-                <a:lnTo>
-                  <a:pt x="344729" y="490118"/>
-                </a:lnTo>
-                <a:lnTo>
-                  <a:pt x="288950" y="455371"/>
-                </a:lnTo>
-                <a:lnTo>
-                  <a:pt x="236830" y="417881"/>
-                </a:lnTo>
-                <a:lnTo>
-                  <a:pt x="189281" y="377647"/>
-                </a:lnTo>
-                <a:lnTo>
-                  <a:pt x="146304" y="334670"/>
-                </a:lnTo>
-                <a:lnTo>
-                  <a:pt x="107899" y="288950"/>
-                </a:lnTo>
-                <a:lnTo>
-                  <a:pt x="75895" y="241402"/>
-                </a:lnTo>
-                <a:lnTo>
-                  <a:pt x="48463" y="192024"/>
-                </a:lnTo>
-                <a:lnTo>
-                  <a:pt x="26518" y="140818"/>
-                </a:lnTo>
-                <a:lnTo>
-                  <a:pt x="10058" y="88697"/>
+                  <a:pt x="72238" y="31090"/>
+                </a:lnTo>
+                <a:lnTo>
+                  <a:pt x="145390" y="25603"/>
+                </a:lnTo>
+                <a:lnTo>
+                  <a:pt x="218542" y="21031"/>
+                </a:lnTo>
+                <a:lnTo>
+                  <a:pt x="290779" y="16459"/>
+                </a:lnTo>
+                <a:lnTo>
+                  <a:pt x="363931" y="12802"/>
+                </a:lnTo>
+                <a:lnTo>
+                  <a:pt x="436169" y="9144"/>
+                </a:lnTo>
+                <a:lnTo>
+                  <a:pt x="509321" y="6401"/>
+                </a:lnTo>
+                <a:lnTo>
+                  <a:pt x="582473" y="3658"/>
+                </a:lnTo>
+                <a:lnTo>
+                  <a:pt x="654710" y="2743"/>
+                </a:lnTo>
+                <a:lnTo>
+                  <a:pt x="727862" y="914"/>
+                </a:lnTo>
+                <a:lnTo>
+                  <a:pt x="800100" y="0"/>
+                </a:lnTo>
+                <a:lnTo>
+                  <a:pt x="873252" y="0"/>
+                </a:lnTo>
+                <a:lnTo>
+                  <a:pt x="946404" y="0"/>
+                </a:lnTo>
+                <a:lnTo>
+                  <a:pt x="1018642" y="914"/>
+                </a:lnTo>
+                <a:lnTo>
+                  <a:pt x="1091794" y="2743"/>
+                </a:lnTo>
+                <a:lnTo>
+                  <a:pt x="1164031" y="3658"/>
+                </a:lnTo>
+                <a:lnTo>
+                  <a:pt x="1237183" y="6401"/>
+                </a:lnTo>
+                <a:lnTo>
+                  <a:pt x="1310335" y="9144"/>
+                </a:lnTo>
+                <a:lnTo>
+                  <a:pt x="1382573" y="12802"/>
+                </a:lnTo>
+                <a:lnTo>
+                  <a:pt x="1455725" y="16459"/>
+                </a:lnTo>
+                <a:lnTo>
+                  <a:pt x="1527962" y="21031"/>
+                </a:lnTo>
+                <a:lnTo>
+                  <a:pt x="1601114" y="25603"/>
+                </a:lnTo>
+                <a:lnTo>
+                  <a:pt x="1674266" y="31090"/>
+                </a:lnTo>
+                <a:lnTo>
+                  <a:pt x="1746504" y="36576"/>
+                </a:lnTo>
+                <a:lnTo>
+                  <a:pt x="1730959" y="85039"/>
+                </a:lnTo>
+                <a:lnTo>
+                  <a:pt x="1709928" y="132588"/>
+                </a:lnTo>
+                <a:lnTo>
+                  <a:pt x="1683410" y="178308"/>
+                </a:lnTo>
+                <a:lnTo>
+                  <a:pt x="1653235" y="222199"/>
+                </a:lnTo>
+                <a:lnTo>
+                  <a:pt x="1618488" y="265176"/>
+                </a:lnTo>
+                <a:lnTo>
+                  <a:pt x="1579169" y="305410"/>
+                </a:lnTo>
+                <a:lnTo>
+                  <a:pt x="1535278" y="343814"/>
+                </a:lnTo>
+                <a:lnTo>
+                  <a:pt x="1487729" y="379476"/>
+                </a:lnTo>
+                <a:lnTo>
+                  <a:pt x="1437437" y="412394"/>
+                </a:lnTo>
+                <a:lnTo>
+                  <a:pt x="1382573" y="442570"/>
+                </a:lnTo>
+                <a:lnTo>
+                  <a:pt x="1325880" y="469087"/>
+                </a:lnTo>
+                <a:lnTo>
+                  <a:pt x="1266444" y="492862"/>
+                </a:lnTo>
+                <a:lnTo>
+                  <a:pt x="1204265" y="512978"/>
+                </a:lnTo>
+                <a:lnTo>
+                  <a:pt x="1140257" y="529438"/>
+                </a:lnTo>
+                <a:lnTo>
+                  <a:pt x="1075334" y="542239"/>
+                </a:lnTo>
+                <a:lnTo>
+                  <a:pt x="1008583" y="552298"/>
+                </a:lnTo>
+                <a:lnTo>
+                  <a:pt x="940918" y="557784"/>
+                </a:lnTo>
+                <a:lnTo>
+                  <a:pt x="873252" y="559613"/>
+                </a:lnTo>
+                <a:lnTo>
+                  <a:pt x="805586" y="557784"/>
+                </a:lnTo>
+                <a:lnTo>
+                  <a:pt x="737921" y="552298"/>
+                </a:lnTo>
+                <a:lnTo>
+                  <a:pt x="671170" y="542239"/>
+                </a:lnTo>
+                <a:lnTo>
+                  <a:pt x="606247" y="529438"/>
+                </a:lnTo>
+                <a:lnTo>
+                  <a:pt x="542239" y="512978"/>
+                </a:lnTo>
+                <a:lnTo>
+                  <a:pt x="480060" y="492862"/>
+                </a:lnTo>
+                <a:lnTo>
+                  <a:pt x="420624" y="469087"/>
+                </a:lnTo>
+                <a:lnTo>
+                  <a:pt x="363931" y="442570"/>
+                </a:lnTo>
+                <a:lnTo>
+                  <a:pt x="309067" y="412394"/>
+                </a:lnTo>
+                <a:lnTo>
+                  <a:pt x="258775" y="379476"/>
+                </a:lnTo>
+                <a:lnTo>
+                  <a:pt x="211226" y="343814"/>
+                </a:lnTo>
+                <a:lnTo>
+                  <a:pt x="167335" y="305410"/>
+                </a:lnTo>
+                <a:lnTo>
+                  <a:pt x="128016" y="265176"/>
+                </a:lnTo>
+                <a:lnTo>
+                  <a:pt x="93269" y="222199"/>
+                </a:lnTo>
+                <a:lnTo>
+                  <a:pt x="63094" y="178308"/>
+                </a:lnTo>
+                <a:lnTo>
+                  <a:pt x="36576" y="132588"/>
+                </a:lnTo>
+                <a:lnTo>
+                  <a:pt x="15545" y="85039"/>
                 </a:lnTo>
                 <a:close/>
               </a:path>
@@ -8550,7 +8780,7 @@
       </p:sp>
       <p:sp>
         <p:nvSpPr>
-          <p:cNvPr id="23" name="Shape 21"/>
+          <p:cNvPr id="25" name="Shape 23"/>
           <p:cNvSpPr/>
           <p:nvPr/>
         </p:nvSpPr>
@@ -8798,7 +9028,7 @@
       </p:sp>
       <p:sp>
         <p:nvSpPr>
-          <p:cNvPr id="24" name="Shape 22"/>
+          <p:cNvPr id="26" name="Shape 24"/>
           <p:cNvSpPr/>
           <p:nvPr/>
         </p:nvSpPr>
@@ -8820,7 +9050,7 @@
       </p:sp>
       <p:sp>
         <p:nvSpPr>
-          <p:cNvPr id="25" name="Text 23"/>
+          <p:cNvPr id="27" name="Text 25"/>
           <p:cNvSpPr txBox="1"/>
           <p:nvPr/>
         </p:nvSpPr>
@@ -8859,7 +9089,7 @@
       </p:sp>
       <p:sp>
         <p:nvSpPr>
-          <p:cNvPr id="26" name="Text 24"/>
+          <p:cNvPr id="28" name="Text 26"/>
           <p:cNvSpPr txBox="1"/>
           <p:nvPr/>
         </p:nvSpPr>
@@ -8941,7 +9171,7 @@
       </p:sp>
       <p:sp>
         <p:nvSpPr>
-          <p:cNvPr id="27" name="Shape 25"/>
+          <p:cNvPr id="29" name="Shape 27"/>
           <p:cNvSpPr/>
           <p:nvPr/>
         </p:nvSpPr>
@@ -9179,11 +9409,11 @@
             </a:pathLst>
           </a:custGeom>
           <a:solidFill>
-            <a:srgbClr val="F7DFCC"/>
+            <a:srgbClr val="FBE9DF"/>
           </a:solidFill>
           <a:ln w="12700">
             <a:solidFill>
-              <a:srgbClr val="F7DFCC"/>
+              <a:srgbClr val="FBE9DF"/>
             </a:solidFill>
             <a:prstDash val="solid"/>
           </a:ln>
@@ -9191,14 +9421,14 @@
       </p:sp>
       <p:sp>
         <p:nvSpPr>
-          <p:cNvPr id="28" name="Shape 26"/>
+          <p:cNvPr id="30" name="Shape 28"/>
           <p:cNvSpPr/>
           <p:nvPr/>
         </p:nvSpPr>
         <p:spPr>
           <a:xfrm>
-            <a:off x="7418527" y="1953158"/>
-            <a:ext cx="641909" cy="967435"/>
+            <a:off x="7299655" y="1953158"/>
+            <a:ext cx="879653" cy="863194"/>
           </a:xfrm>
           <a:custGeom>
             <a:avLst/>
@@ -9207,87 +9437,202 @@
             <a:cxnLst/>
             <a:rect l="l" t="t" r="r" b="b"/>
             <a:pathLst>
-              <a:path w="641909" h="967435">
+              <a:path w="879653" h="863194">
                 <a:moveTo>
-                  <a:pt x="0" y="967435"/>
+                  <a:pt x="0" y="863194"/>
                 </a:moveTo>
                 <a:lnTo>
-                  <a:pt x="0" y="470916"/>
-                </a:lnTo>
-                <a:lnTo>
-                  <a:pt x="2743" y="409651"/>
-                </a:lnTo>
-                <a:lnTo>
-                  <a:pt x="10973" y="349301"/>
-                </a:lnTo>
-                <a:lnTo>
-                  <a:pt x="24689" y="290779"/>
-                </a:lnTo>
-                <a:lnTo>
-                  <a:pt x="42977" y="235001"/>
-                </a:lnTo>
-                <a:lnTo>
-                  <a:pt x="66751" y="183794"/>
-                </a:lnTo>
-                <a:lnTo>
-                  <a:pt x="94183" y="138074"/>
-                </a:lnTo>
-                <a:lnTo>
-                  <a:pt x="125273" y="96926"/>
-                </a:lnTo>
-                <a:lnTo>
-                  <a:pt x="160934" y="63094"/>
-                </a:lnTo>
-                <a:lnTo>
-                  <a:pt x="198425" y="35662"/>
-                </a:lnTo>
-                <a:lnTo>
-                  <a:pt x="237744" y="16459"/>
-                </a:lnTo>
-                <a:lnTo>
-                  <a:pt x="278892" y="3658"/>
+                  <a:pt x="0" y="549554"/>
+                </a:lnTo>
+                <a:lnTo>
+                  <a:pt x="3658" y="477317"/>
+                </a:lnTo>
+                <a:lnTo>
+                  <a:pt x="14630" y="406908"/>
+                </a:lnTo>
+                <a:lnTo>
+                  <a:pt x="33833" y="339242"/>
+                </a:lnTo>
+                <a:lnTo>
+                  <a:pt x="58522" y="274320"/>
+                </a:lnTo>
+                <a:lnTo>
+                  <a:pt x="90526" y="214884"/>
+                </a:lnTo>
+                <a:lnTo>
+                  <a:pt x="128930" y="160934"/>
+                </a:lnTo>
+                <a:lnTo>
+                  <a:pt x="171907" y="113386"/>
+                </a:lnTo>
+                <a:lnTo>
+                  <a:pt x="220370" y="73152"/>
+                </a:lnTo>
+                <a:lnTo>
+                  <a:pt x="271577" y="42062"/>
+                </a:lnTo>
+                <a:lnTo>
+                  <a:pt x="326441" y="18288"/>
+                </a:lnTo>
+                <a:lnTo>
+                  <a:pt x="382219" y="4572"/>
+                </a:lnTo>
+                <a:lnTo>
+                  <a:pt x="439826" y="0"/>
+                </a:lnTo>
+                <a:lnTo>
+                  <a:pt x="497434" y="4572"/>
+                </a:lnTo>
+                <a:lnTo>
+                  <a:pt x="553212" y="18288"/>
+                </a:lnTo>
+                <a:lnTo>
+                  <a:pt x="608076" y="42062"/>
+                </a:lnTo>
+                <a:lnTo>
+                  <a:pt x="660197" y="73152"/>
+                </a:lnTo>
+                <a:lnTo>
+                  <a:pt x="707746" y="113386"/>
+                </a:lnTo>
+                <a:lnTo>
+                  <a:pt x="750722" y="160934"/>
+                </a:lnTo>
+                <a:lnTo>
+                  <a:pt x="789127" y="214884"/>
+                </a:lnTo>
+                <a:lnTo>
+                  <a:pt x="821131" y="274320"/>
+                </a:lnTo>
+                <a:lnTo>
+                  <a:pt x="845820" y="339242"/>
+                </a:lnTo>
+                <a:lnTo>
+                  <a:pt x="865022" y="406908"/>
+                </a:lnTo>
+                <a:lnTo>
+                  <a:pt x="875995" y="477317"/>
+                </a:lnTo>
+                <a:lnTo>
+                  <a:pt x="879653" y="549554"/>
+                </a:lnTo>
+                <a:lnTo>
+                  <a:pt x="879653" y="863194"/>
+                </a:lnTo>
+                <a:close/>
+              </a:path>
+            </a:pathLst>
+          </a:custGeom>
+          <a:solidFill>
+            <a:srgbClr val="F2C4B0"/>
+          </a:solidFill>
+          <a:ln w="12700">
+            <a:solidFill>
+              <a:srgbClr val="F2C4B0"/>
+            </a:solidFill>
+            <a:prstDash val="solid"/>
+          </a:ln>
+        </p:spPr>
+      </p:sp>
+      <p:sp>
+        <p:nvSpPr>
+          <p:cNvPr id="31" name="Shape 29"/>
+          <p:cNvSpPr/>
+          <p:nvPr/>
+        </p:nvSpPr>
+        <p:spPr>
+          <a:xfrm>
+            <a:off x="7418527" y="2123237"/>
+            <a:ext cx="641909" cy="693115"/>
+          </a:xfrm>
+          <a:custGeom>
+            <a:avLst/>
+            <a:gdLst/>
+            <a:ahLst/>
+            <a:cxnLst/>
+            <a:rect l="l" t="t" r="r" b="b"/>
+            <a:pathLst>
+              <a:path w="641909" h="693115">
+                <a:moveTo>
+                  <a:pt x="0" y="693115"/>
+                </a:moveTo>
+                <a:lnTo>
+                  <a:pt x="0" y="379476"/>
+                </a:lnTo>
+                <a:lnTo>
+                  <a:pt x="2743" y="329184"/>
+                </a:lnTo>
+                <a:lnTo>
+                  <a:pt x="10973" y="280721"/>
+                </a:lnTo>
+                <a:lnTo>
+                  <a:pt x="24689" y="234086"/>
+                </a:lnTo>
+                <a:lnTo>
+                  <a:pt x="42977" y="189281"/>
+                </a:lnTo>
+                <a:lnTo>
+                  <a:pt x="66751" y="148133"/>
+                </a:lnTo>
+                <a:lnTo>
+                  <a:pt x="94183" y="110642"/>
+                </a:lnTo>
+                <a:lnTo>
+                  <a:pt x="125273" y="78638"/>
+                </a:lnTo>
+                <a:lnTo>
+                  <a:pt x="160934" y="50292"/>
+                </a:lnTo>
+                <a:lnTo>
+                  <a:pt x="198425" y="28346"/>
+                </a:lnTo>
+                <a:lnTo>
+                  <a:pt x="237744" y="12802"/>
+                </a:lnTo>
+                <a:lnTo>
+                  <a:pt x="278892" y="2743"/>
                 </a:lnTo>
                 <a:lnTo>
                   <a:pt x="320954" y="0"/>
                 </a:lnTo>
                 <a:lnTo>
-                  <a:pt x="363017" y="3658"/>
-                </a:lnTo>
-                <a:lnTo>
-                  <a:pt x="404165" y="16459"/>
-                </a:lnTo>
-                <a:lnTo>
-                  <a:pt x="443484" y="35662"/>
-                </a:lnTo>
-                <a:lnTo>
-                  <a:pt x="481889" y="63094"/>
-                </a:lnTo>
-                <a:lnTo>
-                  <a:pt x="516636" y="96926"/>
-                </a:lnTo>
-                <a:lnTo>
-                  <a:pt x="547726" y="138074"/>
-                </a:lnTo>
-                <a:lnTo>
-                  <a:pt x="575158" y="183794"/>
-                </a:lnTo>
-                <a:lnTo>
-                  <a:pt x="598932" y="235001"/>
-                </a:lnTo>
-                <a:lnTo>
-                  <a:pt x="617220" y="290779"/>
-                </a:lnTo>
-                <a:lnTo>
-                  <a:pt x="630936" y="349301"/>
-                </a:lnTo>
-                <a:lnTo>
-                  <a:pt x="639166" y="409651"/>
-                </a:lnTo>
-                <a:lnTo>
-                  <a:pt x="641909" y="470916"/>
-                </a:lnTo>
-                <a:lnTo>
-                  <a:pt x="641909" y="967435"/>
+                  <a:pt x="363017" y="2743"/>
+                </a:lnTo>
+                <a:lnTo>
+                  <a:pt x="404165" y="12802"/>
+                </a:lnTo>
+                <a:lnTo>
+                  <a:pt x="443484" y="28346"/>
+                </a:lnTo>
+                <a:lnTo>
+                  <a:pt x="481889" y="50292"/>
+                </a:lnTo>
+                <a:lnTo>
+                  <a:pt x="516636" y="78638"/>
+                </a:lnTo>
+                <a:lnTo>
+                  <a:pt x="547726" y="110642"/>
+                </a:lnTo>
+                <a:lnTo>
+                  <a:pt x="575158" y="148133"/>
+                </a:lnTo>
+                <a:lnTo>
+                  <a:pt x="598932" y="189281"/>
+                </a:lnTo>
+                <a:lnTo>
+                  <a:pt x="617220" y="234086"/>
+                </a:lnTo>
+                <a:lnTo>
+                  <a:pt x="630936" y="280721"/>
+                </a:lnTo>
+                <a:lnTo>
+                  <a:pt x="639166" y="329184"/>
+                </a:lnTo>
+                <a:lnTo>
+                  <a:pt x="641909" y="379476"/>
+                </a:lnTo>
+                <a:lnTo>
+                  <a:pt x="641909" y="693115"/>
                 </a:lnTo>
                 <a:close/>
               </a:path>
@@ -9306,14 +9651,14 @@
       </p:sp>
       <p:sp>
         <p:nvSpPr>
-          <p:cNvPr id="29" name="Shape 27"/>
+          <p:cNvPr id="32" name="Shape 30"/>
           <p:cNvSpPr/>
           <p:nvPr/>
         </p:nvSpPr>
         <p:spPr>
           <a:xfrm>
-            <a:off x="7657186" y="1944014"/>
-            <a:ext cx="164592" cy="322783"/>
+            <a:off x="7648042" y="2114093"/>
+            <a:ext cx="182880" cy="231343"/>
           </a:xfrm>
           <a:custGeom>
             <a:avLst/>
@@ -9322,58 +9667,58 @@
             <a:cxnLst/>
             <a:rect l="l" t="t" r="r" b="b"/>
             <a:pathLst>
-              <a:path w="164592" h="322783">
+              <a:path w="182880" h="231343">
                 <a:moveTo>
                   <a:pt x="0" y="0"/>
                 </a:moveTo>
                 <a:lnTo>
-                  <a:pt x="22860" y="263347"/>
-                </a:lnTo>
-                <a:lnTo>
-                  <a:pt x="24689" y="278892"/>
-                </a:lnTo>
-                <a:lnTo>
-                  <a:pt x="31090" y="293522"/>
-                </a:lnTo>
-                <a:lnTo>
-                  <a:pt x="40234" y="305410"/>
-                </a:lnTo>
-                <a:lnTo>
-                  <a:pt x="53035" y="314554"/>
-                </a:lnTo>
-                <a:lnTo>
-                  <a:pt x="66751" y="320954"/>
-                </a:lnTo>
-                <a:lnTo>
-                  <a:pt x="82296" y="322783"/>
-                </a:lnTo>
-                <a:lnTo>
-                  <a:pt x="97841" y="320954"/>
-                </a:lnTo>
-                <a:lnTo>
-                  <a:pt x="112471" y="314554"/>
-                </a:lnTo>
-                <a:lnTo>
-                  <a:pt x="124358" y="305410"/>
-                </a:lnTo>
-                <a:lnTo>
-                  <a:pt x="133502" y="293522"/>
-                </a:lnTo>
-                <a:lnTo>
-                  <a:pt x="139903" y="278892"/>
-                </a:lnTo>
-                <a:lnTo>
-                  <a:pt x="141732" y="263347"/>
-                </a:lnTo>
-                <a:lnTo>
-                  <a:pt x="164592" y="0"/>
+                  <a:pt x="22860" y="162763"/>
+                </a:lnTo>
+                <a:lnTo>
+                  <a:pt x="25603" y="180137"/>
+                </a:lnTo>
+                <a:lnTo>
+                  <a:pt x="32004" y="197510"/>
+                </a:lnTo>
+                <a:lnTo>
+                  <a:pt x="42977" y="211226"/>
+                </a:lnTo>
+                <a:lnTo>
+                  <a:pt x="57607" y="222199"/>
+                </a:lnTo>
+                <a:lnTo>
+                  <a:pt x="74066" y="228600"/>
+                </a:lnTo>
+                <a:lnTo>
+                  <a:pt x="91440" y="231343"/>
+                </a:lnTo>
+                <a:lnTo>
+                  <a:pt x="108814" y="228600"/>
+                </a:lnTo>
+                <a:lnTo>
+                  <a:pt x="126187" y="222199"/>
+                </a:lnTo>
+                <a:lnTo>
+                  <a:pt x="139903" y="211226"/>
+                </a:lnTo>
+                <a:lnTo>
+                  <a:pt x="150876" y="197510"/>
+                </a:lnTo>
+                <a:lnTo>
+                  <a:pt x="157277" y="180137"/>
+                </a:lnTo>
+                <a:lnTo>
+                  <a:pt x="160020" y="162763"/>
+                </a:lnTo>
+                <a:lnTo>
+                  <a:pt x="182880" y="0"/>
                 </a:lnTo>
                 <a:close/>
               </a:path>
             </a:pathLst>
           </a:custGeom>
           <a:solidFill>
-            <a:srgbClr val="F7DFCC"/>
+            <a:srgbClr val="F2C4B0"/>
           </a:solidFill>
           <a:ln w="25400">
             <a:solidFill>
@@ -9385,14 +9730,14 @@
       </p:sp>
       <p:sp>
         <p:nvSpPr>
-          <p:cNvPr id="30" name="Shape 28"/>
+          <p:cNvPr id="33" name="Shape 31"/>
           <p:cNvSpPr/>
           <p:nvPr/>
         </p:nvSpPr>
         <p:spPr>
           <a:xfrm>
-            <a:off x="6847942" y="2047342"/>
-            <a:ext cx="1783080" cy="951890"/>
+            <a:off x="6847942" y="2204618"/>
+            <a:ext cx="1783080" cy="794614"/>
           </a:xfrm>
           <a:custGeom>
             <a:avLst/>
@@ -9401,186 +9746,186 @@
             <a:cxnLst/>
             <a:rect l="l" t="t" r="r" b="b"/>
             <a:pathLst>
-              <a:path w="1783080" h="951890">
+              <a:path w="1783080" h="794614">
                 <a:moveTo>
-                  <a:pt x="74066" y="36576"/>
+                  <a:pt x="11887" y="36576"/>
                 </a:moveTo>
                 <a:lnTo>
-                  <a:pt x="142646" y="31090"/>
-                </a:lnTo>
-                <a:lnTo>
-                  <a:pt x="210312" y="25603"/>
-                </a:lnTo>
-                <a:lnTo>
-                  <a:pt x="278892" y="21031"/>
-                </a:lnTo>
-                <a:lnTo>
-                  <a:pt x="346558" y="16459"/>
-                </a:lnTo>
-                <a:lnTo>
-                  <a:pt x="415138" y="12802"/>
-                </a:lnTo>
-                <a:lnTo>
-                  <a:pt x="482803" y="9144"/>
-                </a:lnTo>
-                <a:lnTo>
-                  <a:pt x="551383" y="6401"/>
-                </a:lnTo>
-                <a:lnTo>
-                  <a:pt x="619049" y="3658"/>
-                </a:lnTo>
-                <a:lnTo>
-                  <a:pt x="687629" y="2743"/>
-                </a:lnTo>
-                <a:lnTo>
-                  <a:pt x="755294" y="914"/>
-                </a:lnTo>
-                <a:lnTo>
-                  <a:pt x="823874" y="0"/>
+                  <a:pt x="85039" y="30175"/>
+                </a:lnTo>
+                <a:lnTo>
+                  <a:pt x="158191" y="24689"/>
+                </a:lnTo>
+                <a:lnTo>
+                  <a:pt x="231343" y="20117"/>
+                </a:lnTo>
+                <a:lnTo>
+                  <a:pt x="304495" y="15545"/>
+                </a:lnTo>
+                <a:lnTo>
+                  <a:pt x="378562" y="11887"/>
+                </a:lnTo>
+                <a:lnTo>
+                  <a:pt x="451714" y="9144"/>
+                </a:lnTo>
+                <a:lnTo>
+                  <a:pt x="524866" y="6401"/>
+                </a:lnTo>
+                <a:lnTo>
+                  <a:pt x="598018" y="3658"/>
+                </a:lnTo>
+                <a:lnTo>
+                  <a:pt x="671170" y="1829"/>
+                </a:lnTo>
+                <a:lnTo>
+                  <a:pt x="745236" y="914"/>
+                </a:lnTo>
+                <a:lnTo>
+                  <a:pt x="818388" y="0"/>
                 </a:lnTo>
                 <a:lnTo>
                   <a:pt x="891540" y="0"/>
                 </a:lnTo>
                 <a:lnTo>
-                  <a:pt x="959206" y="0"/>
-                </a:lnTo>
-                <a:lnTo>
-                  <a:pt x="1027786" y="914"/>
-                </a:lnTo>
-                <a:lnTo>
-                  <a:pt x="1095451" y="2743"/>
-                </a:lnTo>
-                <a:lnTo>
-                  <a:pt x="1164031" y="3658"/>
-                </a:lnTo>
-                <a:lnTo>
-                  <a:pt x="1231697" y="6401"/>
-                </a:lnTo>
-                <a:lnTo>
-                  <a:pt x="1300277" y="9144"/>
-                </a:lnTo>
-                <a:lnTo>
-                  <a:pt x="1367942" y="12802"/>
-                </a:lnTo>
-                <a:lnTo>
-                  <a:pt x="1436522" y="16459"/>
-                </a:lnTo>
-                <a:lnTo>
-                  <a:pt x="1504188" y="21031"/>
-                </a:lnTo>
-                <a:lnTo>
-                  <a:pt x="1572768" y="25603"/>
-                </a:lnTo>
-                <a:lnTo>
-                  <a:pt x="1640434" y="31090"/>
-                </a:lnTo>
-                <a:lnTo>
-                  <a:pt x="1709014" y="36576"/>
-                </a:lnTo>
-                <a:lnTo>
-                  <a:pt x="1742846" y="104242"/>
-                </a:lnTo>
-                <a:lnTo>
-                  <a:pt x="1766621" y="173736"/>
-                </a:lnTo>
-                <a:lnTo>
-                  <a:pt x="1780337" y="245059"/>
-                </a:lnTo>
-                <a:lnTo>
-                  <a:pt x="1783080" y="317297"/>
-                </a:lnTo>
-                <a:lnTo>
-                  <a:pt x="1774850" y="388620"/>
-                </a:lnTo>
-                <a:lnTo>
-                  <a:pt x="1755648" y="459029"/>
-                </a:lnTo>
-                <a:lnTo>
-                  <a:pt x="1726387" y="527609"/>
-                </a:lnTo>
-                <a:lnTo>
-                  <a:pt x="1686154" y="594360"/>
-                </a:lnTo>
-                <a:lnTo>
-                  <a:pt x="1637690" y="656539"/>
-                </a:lnTo>
-                <a:lnTo>
-                  <a:pt x="1579169" y="714146"/>
-                </a:lnTo>
-                <a:lnTo>
-                  <a:pt x="1512418" y="767182"/>
-                </a:lnTo>
-                <a:lnTo>
-                  <a:pt x="1438351" y="814730"/>
-                </a:lnTo>
-                <a:lnTo>
-                  <a:pt x="1357884" y="854964"/>
-                </a:lnTo>
-                <a:lnTo>
-                  <a:pt x="1271930" y="889711"/>
-                </a:lnTo>
-                <a:lnTo>
-                  <a:pt x="1180490" y="916229"/>
-                </a:lnTo>
-                <a:lnTo>
-                  <a:pt x="1086307" y="936346"/>
-                </a:lnTo>
-                <a:lnTo>
-                  <a:pt x="989381" y="948233"/>
-                </a:lnTo>
-                <a:lnTo>
-                  <a:pt x="891540" y="951890"/>
-                </a:lnTo>
-                <a:lnTo>
-                  <a:pt x="793699" y="948233"/>
-                </a:lnTo>
-                <a:lnTo>
-                  <a:pt x="696773" y="936346"/>
-                </a:lnTo>
-                <a:lnTo>
-                  <a:pt x="602590" y="916229"/>
-                </a:lnTo>
-                <a:lnTo>
-                  <a:pt x="511150" y="889711"/>
-                </a:lnTo>
-                <a:lnTo>
-                  <a:pt x="425196" y="854964"/>
-                </a:lnTo>
-                <a:lnTo>
-                  <a:pt x="344729" y="814730"/>
-                </a:lnTo>
-                <a:lnTo>
-                  <a:pt x="270662" y="767182"/>
-                </a:lnTo>
-                <a:lnTo>
-                  <a:pt x="203911" y="714146"/>
-                </a:lnTo>
-                <a:lnTo>
-                  <a:pt x="145390" y="656539"/>
-                </a:lnTo>
-                <a:lnTo>
-                  <a:pt x="96926" y="594360"/>
-                </a:lnTo>
-                <a:lnTo>
-                  <a:pt x="56693" y="527609"/>
-                </a:lnTo>
-                <a:lnTo>
-                  <a:pt x="27432" y="459029"/>
-                </a:lnTo>
-                <a:lnTo>
-                  <a:pt x="8230" y="388620"/>
-                </a:lnTo>
-                <a:lnTo>
-                  <a:pt x="0" y="317297"/>
-                </a:lnTo>
-                <a:lnTo>
-                  <a:pt x="2743" y="245059"/>
-                </a:lnTo>
-                <a:lnTo>
-                  <a:pt x="16459" y="173736"/>
-                </a:lnTo>
-                <a:lnTo>
-                  <a:pt x="40234" y="104242"/>
+                  <a:pt x="964692" y="0"/>
+                </a:lnTo>
+                <a:lnTo>
+                  <a:pt x="1037844" y="914"/>
+                </a:lnTo>
+                <a:lnTo>
+                  <a:pt x="1111910" y="1829"/>
+                </a:lnTo>
+                <a:lnTo>
+                  <a:pt x="1185062" y="3658"/>
+                </a:lnTo>
+                <a:lnTo>
+                  <a:pt x="1258214" y="6401"/>
+                </a:lnTo>
+                <a:lnTo>
+                  <a:pt x="1331366" y="9144"/>
+                </a:lnTo>
+                <a:lnTo>
+                  <a:pt x="1404518" y="11887"/>
+                </a:lnTo>
+                <a:lnTo>
+                  <a:pt x="1478585" y="15545"/>
+                </a:lnTo>
+                <a:lnTo>
+                  <a:pt x="1551737" y="20117"/>
+                </a:lnTo>
+                <a:lnTo>
+                  <a:pt x="1624889" y="24689"/>
+                </a:lnTo>
+                <a:lnTo>
+                  <a:pt x="1698041" y="30175"/>
+                </a:lnTo>
+                <a:lnTo>
+                  <a:pt x="1771193" y="36576"/>
+                </a:lnTo>
+                <a:lnTo>
+                  <a:pt x="1781251" y="98755"/>
+                </a:lnTo>
+                <a:lnTo>
+                  <a:pt x="1783080" y="161849"/>
+                </a:lnTo>
+                <a:lnTo>
+                  <a:pt x="1775765" y="224028"/>
+                </a:lnTo>
+                <a:lnTo>
+                  <a:pt x="1761134" y="286207"/>
+                </a:lnTo>
+                <a:lnTo>
+                  <a:pt x="1737360" y="346558"/>
+                </a:lnTo>
+                <a:lnTo>
+                  <a:pt x="1707185" y="405079"/>
+                </a:lnTo>
+                <a:lnTo>
+                  <a:pt x="1668780" y="461772"/>
+                </a:lnTo>
+                <a:lnTo>
+                  <a:pt x="1623060" y="514807"/>
+                </a:lnTo>
+                <a:lnTo>
+                  <a:pt x="1570939" y="564185"/>
+                </a:lnTo>
+                <a:lnTo>
+                  <a:pt x="1511503" y="610819"/>
+                </a:lnTo>
+                <a:lnTo>
+                  <a:pt x="1447495" y="651967"/>
+                </a:lnTo>
+                <a:lnTo>
+                  <a:pt x="1378001" y="688543"/>
+                </a:lnTo>
+                <a:lnTo>
+                  <a:pt x="1303934" y="720547"/>
+                </a:lnTo>
+                <a:lnTo>
+                  <a:pt x="1226210" y="747065"/>
+                </a:lnTo>
+                <a:lnTo>
+                  <a:pt x="1144829" y="767182"/>
+                </a:lnTo>
+                <a:lnTo>
+                  <a:pt x="1061618" y="782726"/>
+                </a:lnTo>
+                <a:lnTo>
+                  <a:pt x="977494" y="791870"/>
+                </a:lnTo>
+                <a:lnTo>
+                  <a:pt x="891540" y="794614"/>
+                </a:lnTo>
+                <a:lnTo>
+                  <a:pt x="805586" y="791870"/>
+                </a:lnTo>
+                <a:lnTo>
+                  <a:pt x="721462" y="782726"/>
+                </a:lnTo>
+                <a:lnTo>
+                  <a:pt x="638251" y="767182"/>
+                </a:lnTo>
+                <a:lnTo>
+                  <a:pt x="556870" y="747065"/>
+                </a:lnTo>
+                <a:lnTo>
+                  <a:pt x="479146" y="720547"/>
+                </a:lnTo>
+                <a:lnTo>
+                  <a:pt x="405079" y="688543"/>
+                </a:lnTo>
+                <a:lnTo>
+                  <a:pt x="335585" y="651967"/>
+                </a:lnTo>
+                <a:lnTo>
+                  <a:pt x="271577" y="610819"/>
+                </a:lnTo>
+                <a:lnTo>
+                  <a:pt x="212141" y="564185"/>
+                </a:lnTo>
+                <a:lnTo>
+                  <a:pt x="160020" y="514807"/>
+                </a:lnTo>
+                <a:lnTo>
+                  <a:pt x="114300" y="461772"/>
+                </a:lnTo>
+                <a:lnTo>
+                  <a:pt x="75895" y="405079"/>
+                </a:lnTo>
+                <a:lnTo>
+                  <a:pt x="45720" y="346558"/>
+                </a:lnTo>
+                <a:lnTo>
+                  <a:pt x="21946" y="286207"/>
+                </a:lnTo>
+                <a:lnTo>
+                  <a:pt x="7315" y="224028"/>
+                </a:lnTo>
+                <a:lnTo>
+                  <a:pt x="0" y="161849"/>
+                </a:lnTo>
+                <a:lnTo>
+                  <a:pt x="1829" y="98755"/>
                 </a:lnTo>
                 <a:close/>
               </a:path>
@@ -9599,7 +9944,7 @@
       </p:sp>
       <p:sp>
         <p:nvSpPr>
-          <p:cNvPr id="31" name="Shape 29"/>
+          <p:cNvPr id="34" name="Shape 32"/>
           <p:cNvSpPr/>
           <p:nvPr/>
         </p:nvSpPr>
@@ -9847,7 +10192,7 @@
       </p:sp>
       <p:sp>
         <p:nvSpPr>
-          <p:cNvPr id="32" name="Shape 30"/>
+          <p:cNvPr id="35" name="Shape 33"/>
           <p:cNvSpPr/>
           <p:nvPr/>
         </p:nvSpPr>
@@ -9869,7 +10214,7 @@
       </p:sp>
       <p:sp>
         <p:nvSpPr>
-          <p:cNvPr id="33" name="Text 31"/>
+          <p:cNvPr id="36" name="Text 34"/>
           <p:cNvSpPr txBox="1"/>
           <p:nvPr/>
         </p:nvSpPr>
@@ -9908,7 +10253,7 @@
       </p:sp>
       <p:sp>
         <p:nvSpPr>
-          <p:cNvPr id="34" name="Text 32"/>
+          <p:cNvPr id="37" name="Text 35"/>
           <p:cNvSpPr txBox="1"/>
           <p:nvPr/>
         </p:nvSpPr>
@@ -9990,7 +10335,7 @@
       </p:sp>
       <p:sp>
         <p:nvSpPr>
-          <p:cNvPr id="35" name="Shape 33"/>
+          <p:cNvPr id="38" name="Shape 36"/>
           <p:cNvSpPr/>
           <p:nvPr/>
         </p:nvSpPr>
@@ -10228,11 +10573,11 @@
             </a:pathLst>
           </a:custGeom>
           <a:solidFill>
-            <a:srgbClr val="F7DFCC"/>
+            <a:srgbClr val="FBE9DF"/>
           </a:solidFill>
           <a:ln w="12700">
             <a:solidFill>
-              <a:srgbClr val="F7DFCC"/>
+              <a:srgbClr val="FBE9DF"/>
             </a:solidFill>
             <a:prstDash val="solid"/>
           </a:ln>
@@ -10240,14 +10585,14 @@
       </p:sp>
       <p:sp>
         <p:nvSpPr>
-          <p:cNvPr id="36" name="Shape 34"/>
+          <p:cNvPr id="39" name="Shape 37"/>
           <p:cNvSpPr/>
           <p:nvPr/>
         </p:nvSpPr>
         <p:spPr>
           <a:xfrm>
-            <a:off x="10121494" y="1953158"/>
-            <a:ext cx="641909" cy="967435"/>
+            <a:off x="10002622" y="1953158"/>
+            <a:ext cx="879653" cy="863194"/>
           </a:xfrm>
           <a:custGeom>
             <a:avLst/>
@@ -10256,87 +10601,202 @@
             <a:cxnLst/>
             <a:rect l="l" t="t" r="r" b="b"/>
             <a:pathLst>
-              <a:path w="641909" h="967435">
+              <a:path w="879653" h="863194">
                 <a:moveTo>
-                  <a:pt x="0" y="967435"/>
+                  <a:pt x="0" y="863194"/>
                 </a:moveTo>
                 <a:lnTo>
-                  <a:pt x="0" y="470916"/>
-                </a:lnTo>
-                <a:lnTo>
-                  <a:pt x="2743" y="409651"/>
-                </a:lnTo>
-                <a:lnTo>
-                  <a:pt x="10973" y="349301"/>
-                </a:lnTo>
-                <a:lnTo>
-                  <a:pt x="24689" y="290779"/>
-                </a:lnTo>
-                <a:lnTo>
-                  <a:pt x="42977" y="235001"/>
-                </a:lnTo>
-                <a:lnTo>
-                  <a:pt x="66751" y="183794"/>
-                </a:lnTo>
-                <a:lnTo>
-                  <a:pt x="94183" y="138074"/>
-                </a:lnTo>
-                <a:lnTo>
-                  <a:pt x="125273" y="96926"/>
-                </a:lnTo>
-                <a:lnTo>
-                  <a:pt x="160934" y="63094"/>
-                </a:lnTo>
-                <a:lnTo>
-                  <a:pt x="198425" y="35662"/>
-                </a:lnTo>
-                <a:lnTo>
-                  <a:pt x="237744" y="16459"/>
-                </a:lnTo>
-                <a:lnTo>
-                  <a:pt x="278892" y="3658"/>
+                  <a:pt x="0" y="549554"/>
+                </a:lnTo>
+                <a:lnTo>
+                  <a:pt x="3658" y="477317"/>
+                </a:lnTo>
+                <a:lnTo>
+                  <a:pt x="14630" y="406908"/>
+                </a:lnTo>
+                <a:lnTo>
+                  <a:pt x="33833" y="339242"/>
+                </a:lnTo>
+                <a:lnTo>
+                  <a:pt x="58522" y="274320"/>
+                </a:lnTo>
+                <a:lnTo>
+                  <a:pt x="90526" y="214884"/>
+                </a:lnTo>
+                <a:lnTo>
+                  <a:pt x="128930" y="160934"/>
+                </a:lnTo>
+                <a:lnTo>
+                  <a:pt x="171907" y="113386"/>
+                </a:lnTo>
+                <a:lnTo>
+                  <a:pt x="220370" y="73152"/>
+                </a:lnTo>
+                <a:lnTo>
+                  <a:pt x="271577" y="42062"/>
+                </a:lnTo>
+                <a:lnTo>
+                  <a:pt x="326441" y="18288"/>
+                </a:lnTo>
+                <a:lnTo>
+                  <a:pt x="382219" y="4572"/>
+                </a:lnTo>
+                <a:lnTo>
+                  <a:pt x="439826" y="0"/>
+                </a:lnTo>
+                <a:lnTo>
+                  <a:pt x="497434" y="4572"/>
+                </a:lnTo>
+                <a:lnTo>
+                  <a:pt x="553212" y="18288"/>
+                </a:lnTo>
+                <a:lnTo>
+                  <a:pt x="608076" y="42062"/>
+                </a:lnTo>
+                <a:lnTo>
+                  <a:pt x="659282" y="73152"/>
+                </a:lnTo>
+                <a:lnTo>
+                  <a:pt x="707746" y="113386"/>
+                </a:lnTo>
+                <a:lnTo>
+                  <a:pt x="750722" y="160934"/>
+                </a:lnTo>
+                <a:lnTo>
+                  <a:pt x="789127" y="214884"/>
+                </a:lnTo>
+                <a:lnTo>
+                  <a:pt x="821131" y="274320"/>
+                </a:lnTo>
+                <a:lnTo>
+                  <a:pt x="845820" y="339242"/>
+                </a:lnTo>
+                <a:lnTo>
+                  <a:pt x="865022" y="406908"/>
+                </a:lnTo>
+                <a:lnTo>
+                  <a:pt x="875995" y="477317"/>
+                </a:lnTo>
+                <a:lnTo>
+                  <a:pt x="879653" y="549554"/>
+                </a:lnTo>
+                <a:lnTo>
+                  <a:pt x="879653" y="863194"/>
+                </a:lnTo>
+                <a:close/>
+              </a:path>
+            </a:pathLst>
+          </a:custGeom>
+          <a:solidFill>
+            <a:srgbClr val="F2C4B0"/>
+          </a:solidFill>
+          <a:ln w="12700">
+            <a:solidFill>
+              <a:srgbClr val="F2C4B0"/>
+            </a:solidFill>
+            <a:prstDash val="solid"/>
+          </a:ln>
+        </p:spPr>
+      </p:sp>
+      <p:sp>
+        <p:nvSpPr>
+          <p:cNvPr id="40" name="Shape 38"/>
+          <p:cNvSpPr/>
+          <p:nvPr/>
+        </p:nvSpPr>
+        <p:spPr>
+          <a:xfrm>
+            <a:off x="10121494" y="2123237"/>
+            <a:ext cx="641909" cy="693115"/>
+          </a:xfrm>
+          <a:custGeom>
+            <a:avLst/>
+            <a:gdLst/>
+            <a:ahLst/>
+            <a:cxnLst/>
+            <a:rect l="l" t="t" r="r" b="b"/>
+            <a:pathLst>
+              <a:path w="641909" h="693115">
+                <a:moveTo>
+                  <a:pt x="0" y="693115"/>
+                </a:moveTo>
+                <a:lnTo>
+                  <a:pt x="0" y="379476"/>
+                </a:lnTo>
+                <a:lnTo>
+                  <a:pt x="2743" y="329184"/>
+                </a:lnTo>
+                <a:lnTo>
+                  <a:pt x="10973" y="280721"/>
+                </a:lnTo>
+                <a:lnTo>
+                  <a:pt x="24689" y="234086"/>
+                </a:lnTo>
+                <a:lnTo>
+                  <a:pt x="42977" y="189281"/>
+                </a:lnTo>
+                <a:lnTo>
+                  <a:pt x="66751" y="148133"/>
+                </a:lnTo>
+                <a:lnTo>
+                  <a:pt x="94183" y="110642"/>
+                </a:lnTo>
+                <a:lnTo>
+                  <a:pt x="125273" y="78638"/>
+                </a:lnTo>
+                <a:lnTo>
+                  <a:pt x="160934" y="50292"/>
+                </a:lnTo>
+                <a:lnTo>
+                  <a:pt x="198425" y="28346"/>
+                </a:lnTo>
+                <a:lnTo>
+                  <a:pt x="237744" y="12802"/>
+                </a:lnTo>
+                <a:lnTo>
+                  <a:pt x="278892" y="2743"/>
                 </a:lnTo>
                 <a:lnTo>
                   <a:pt x="320954" y="0"/>
                 </a:lnTo>
                 <a:lnTo>
-                  <a:pt x="363017" y="3658"/>
-                </a:lnTo>
-                <a:lnTo>
-                  <a:pt x="404165" y="16459"/>
-                </a:lnTo>
-                <a:lnTo>
-                  <a:pt x="443484" y="35662"/>
-                </a:lnTo>
-                <a:lnTo>
-                  <a:pt x="481889" y="63094"/>
-                </a:lnTo>
-                <a:lnTo>
-                  <a:pt x="516636" y="96926"/>
-                </a:lnTo>
-                <a:lnTo>
-                  <a:pt x="547726" y="138074"/>
-                </a:lnTo>
-                <a:lnTo>
-                  <a:pt x="575158" y="183794"/>
-                </a:lnTo>
-                <a:lnTo>
-                  <a:pt x="598932" y="235001"/>
-                </a:lnTo>
-                <a:lnTo>
-                  <a:pt x="617220" y="290779"/>
-                </a:lnTo>
-                <a:lnTo>
-                  <a:pt x="630936" y="349301"/>
-                </a:lnTo>
-                <a:lnTo>
-                  <a:pt x="639166" y="409651"/>
-                </a:lnTo>
-                <a:lnTo>
-                  <a:pt x="641909" y="470916"/>
-                </a:lnTo>
-                <a:lnTo>
-                  <a:pt x="641909" y="967435"/>
+                  <a:pt x="363017" y="2743"/>
+                </a:lnTo>
+                <a:lnTo>
+                  <a:pt x="404165" y="12802"/>
+                </a:lnTo>
+                <a:lnTo>
+                  <a:pt x="443484" y="28346"/>
+                </a:lnTo>
+                <a:lnTo>
+                  <a:pt x="481889" y="50292"/>
+                </a:lnTo>
+                <a:lnTo>
+                  <a:pt x="516636" y="78638"/>
+                </a:lnTo>
+                <a:lnTo>
+                  <a:pt x="547726" y="110642"/>
+                </a:lnTo>
+                <a:lnTo>
+                  <a:pt x="575158" y="148133"/>
+                </a:lnTo>
+                <a:lnTo>
+                  <a:pt x="598932" y="189281"/>
+                </a:lnTo>
+                <a:lnTo>
+                  <a:pt x="617220" y="234086"/>
+                </a:lnTo>
+                <a:lnTo>
+                  <a:pt x="630936" y="280721"/>
+                </a:lnTo>
+                <a:lnTo>
+                  <a:pt x="639166" y="329184"/>
+                </a:lnTo>
+                <a:lnTo>
+                  <a:pt x="641909" y="379476"/>
+                </a:lnTo>
+                <a:lnTo>
+                  <a:pt x="641909" y="693115"/>
                 </a:lnTo>
                 <a:close/>
               </a:path>
@@ -10355,14 +10815,14 @@
       </p:sp>
       <p:sp>
         <p:nvSpPr>
-          <p:cNvPr id="37" name="Shape 35"/>
+          <p:cNvPr id="41" name="Shape 39"/>
           <p:cNvSpPr/>
           <p:nvPr/>
         </p:nvSpPr>
         <p:spPr>
           <a:xfrm>
-            <a:off x="10360152" y="1944014"/>
-            <a:ext cx="164592" cy="322783"/>
+            <a:off x="10351008" y="2114093"/>
+            <a:ext cx="182880" cy="231343"/>
           </a:xfrm>
           <a:custGeom>
             <a:avLst/>
@@ -10371,58 +10831,58 @@
             <a:cxnLst/>
             <a:rect l="l" t="t" r="r" b="b"/>
             <a:pathLst>
-              <a:path w="164592" h="322783">
+              <a:path w="182880" h="231343">
                 <a:moveTo>
                   <a:pt x="0" y="0"/>
                 </a:moveTo>
                 <a:lnTo>
-                  <a:pt x="22860" y="263347"/>
-                </a:lnTo>
-                <a:lnTo>
-                  <a:pt x="24689" y="278892"/>
-                </a:lnTo>
-                <a:lnTo>
-                  <a:pt x="31090" y="293522"/>
-                </a:lnTo>
-                <a:lnTo>
-                  <a:pt x="40234" y="305410"/>
-                </a:lnTo>
-                <a:lnTo>
-                  <a:pt x="53035" y="314554"/>
-                </a:lnTo>
-                <a:lnTo>
-                  <a:pt x="66751" y="320954"/>
-                </a:lnTo>
-                <a:lnTo>
-                  <a:pt x="82296" y="322783"/>
-                </a:lnTo>
-                <a:lnTo>
-                  <a:pt x="97841" y="320954"/>
-                </a:lnTo>
-                <a:lnTo>
-                  <a:pt x="112471" y="314554"/>
-                </a:lnTo>
-                <a:lnTo>
-                  <a:pt x="124358" y="305410"/>
-                </a:lnTo>
-                <a:lnTo>
-                  <a:pt x="133502" y="293522"/>
-                </a:lnTo>
-                <a:lnTo>
-                  <a:pt x="139903" y="278892"/>
-                </a:lnTo>
-                <a:lnTo>
-                  <a:pt x="141732" y="263347"/>
-                </a:lnTo>
-                <a:lnTo>
-                  <a:pt x="164592" y="0"/>
+                  <a:pt x="22860" y="162763"/>
+                </a:lnTo>
+                <a:lnTo>
+                  <a:pt x="25603" y="180137"/>
+                </a:lnTo>
+                <a:lnTo>
+                  <a:pt x="32004" y="197510"/>
+                </a:lnTo>
+                <a:lnTo>
+                  <a:pt x="42977" y="211226"/>
+                </a:lnTo>
+                <a:lnTo>
+                  <a:pt x="57607" y="222199"/>
+                </a:lnTo>
+                <a:lnTo>
+                  <a:pt x="74066" y="228600"/>
+                </a:lnTo>
+                <a:lnTo>
+                  <a:pt x="91440" y="231343"/>
+                </a:lnTo>
+                <a:lnTo>
+                  <a:pt x="108814" y="228600"/>
+                </a:lnTo>
+                <a:lnTo>
+                  <a:pt x="126187" y="222199"/>
+                </a:lnTo>
+                <a:lnTo>
+                  <a:pt x="139903" y="211226"/>
+                </a:lnTo>
+                <a:lnTo>
+                  <a:pt x="150876" y="197510"/>
+                </a:lnTo>
+                <a:lnTo>
+                  <a:pt x="157277" y="180137"/>
+                </a:lnTo>
+                <a:lnTo>
+                  <a:pt x="160020" y="162763"/>
+                </a:lnTo>
+                <a:lnTo>
+                  <a:pt x="182880" y="0"/>
                 </a:lnTo>
                 <a:close/>
               </a:path>
             </a:pathLst>
           </a:custGeom>
           <a:solidFill>
-            <a:srgbClr val="F7DFCC"/>
+            <a:srgbClr val="F2C4B0"/>
           </a:solidFill>
           <a:ln w="25400">
             <a:solidFill>
@@ -10434,14 +10894,14 @@
       </p:sp>
       <p:sp>
         <p:nvSpPr>
-          <p:cNvPr id="38" name="Shape 36"/>
+          <p:cNvPr id="42" name="Shape 40"/>
           <p:cNvSpPr/>
           <p:nvPr/>
         </p:nvSpPr>
         <p:spPr>
           <a:xfrm>
-            <a:off x="9550908" y="1825142"/>
-            <a:ext cx="1783080" cy="1174090"/>
+            <a:off x="9551822" y="1877263"/>
+            <a:ext cx="1781251" cy="1121969"/>
           </a:xfrm>
           <a:custGeom>
             <a:avLst/>
@@ -10450,186 +10910,186 @@
             <a:cxnLst/>
             <a:rect l="l" t="t" r="r" b="b"/>
             <a:pathLst>
-              <a:path w="1783080" h="1174090">
+              <a:path w="1781251" h="1121969">
                 <a:moveTo>
-                  <a:pt x="291694" y="36576"/>
+                  <a:pt x="221285" y="36576"/>
                 </a:moveTo>
                 <a:lnTo>
-                  <a:pt x="341986" y="31090"/>
-                </a:lnTo>
-                <a:lnTo>
-                  <a:pt x="392278" y="25603"/>
-                </a:lnTo>
-                <a:lnTo>
-                  <a:pt x="441655" y="20117"/>
-                </a:lnTo>
-                <a:lnTo>
-                  <a:pt x="491947" y="16459"/>
-                </a:lnTo>
-                <a:lnTo>
-                  <a:pt x="541325" y="12802"/>
-                </a:lnTo>
-                <a:lnTo>
-                  <a:pt x="591617" y="9144"/>
-                </a:lnTo>
-                <a:lnTo>
-                  <a:pt x="641909" y="6401"/>
-                </a:lnTo>
-                <a:lnTo>
-                  <a:pt x="691286" y="3658"/>
-                </a:lnTo>
-                <a:lnTo>
-                  <a:pt x="741578" y="1829"/>
-                </a:lnTo>
-                <a:lnTo>
-                  <a:pt x="791870" y="914"/>
-                </a:lnTo>
-                <a:lnTo>
-                  <a:pt x="841248" y="0"/>
-                </a:lnTo>
-                <a:lnTo>
-                  <a:pt x="891540" y="0"/>
-                </a:lnTo>
-                <a:lnTo>
-                  <a:pt x="941832" y="0"/>
-                </a:lnTo>
-                <a:lnTo>
-                  <a:pt x="991210" y="914"/>
-                </a:lnTo>
-                <a:lnTo>
-                  <a:pt x="1041502" y="1829"/>
-                </a:lnTo>
-                <a:lnTo>
-                  <a:pt x="1091794" y="3658"/>
-                </a:lnTo>
-                <a:lnTo>
-                  <a:pt x="1141171" y="6401"/>
-                </a:lnTo>
-                <a:lnTo>
-                  <a:pt x="1191463" y="9144"/>
-                </a:lnTo>
-                <a:lnTo>
-                  <a:pt x="1241755" y="12802"/>
-                </a:lnTo>
-                <a:lnTo>
-                  <a:pt x="1291133" y="16459"/>
-                </a:lnTo>
-                <a:lnTo>
-                  <a:pt x="1341425" y="20117"/>
-                </a:lnTo>
-                <a:lnTo>
-                  <a:pt x="1390802" y="25603"/>
-                </a:lnTo>
-                <a:lnTo>
-                  <a:pt x="1441094" y="31090"/>
-                </a:lnTo>
-                <a:lnTo>
-                  <a:pt x="1491386" y="36576"/>
-                </a:lnTo>
-                <a:lnTo>
-                  <a:pt x="1573682" y="99670"/>
-                </a:lnTo>
-                <a:lnTo>
-                  <a:pt x="1644091" y="170078"/>
-                </a:lnTo>
-                <a:lnTo>
-                  <a:pt x="1700784" y="245974"/>
-                </a:lnTo>
-                <a:lnTo>
-                  <a:pt x="1743761" y="327355"/>
-                </a:lnTo>
-                <a:lnTo>
-                  <a:pt x="1771193" y="412394"/>
-                </a:lnTo>
-                <a:lnTo>
-                  <a:pt x="1783080" y="499262"/>
-                </a:lnTo>
-                <a:lnTo>
-                  <a:pt x="1778508" y="587045"/>
-                </a:lnTo>
-                <a:lnTo>
-                  <a:pt x="1758391" y="672998"/>
-                </a:lnTo>
-                <a:lnTo>
-                  <a:pt x="1722730" y="756209"/>
-                </a:lnTo>
-                <a:lnTo>
-                  <a:pt x="1673352" y="834847"/>
-                </a:lnTo>
-                <a:lnTo>
-                  <a:pt x="1608430" y="908914"/>
-                </a:lnTo>
-                <a:lnTo>
-                  <a:pt x="1531620" y="974750"/>
-                </a:lnTo>
-                <a:lnTo>
-                  <a:pt x="1443838" y="1033272"/>
-                </a:lnTo>
-                <a:lnTo>
-                  <a:pt x="1345082" y="1082650"/>
-                </a:lnTo>
-                <a:lnTo>
-                  <a:pt x="1239012" y="1121969"/>
-                </a:lnTo>
-                <a:lnTo>
-                  <a:pt x="1126541" y="1151230"/>
-                </a:lnTo>
-                <a:lnTo>
-                  <a:pt x="1010412" y="1168603"/>
-                </a:lnTo>
-                <a:lnTo>
-                  <a:pt x="891540" y="1174090"/>
-                </a:lnTo>
-                <a:lnTo>
-                  <a:pt x="772668" y="1168603"/>
-                </a:lnTo>
-                <a:lnTo>
-                  <a:pt x="656539" y="1151230"/>
-                </a:lnTo>
-                <a:lnTo>
-                  <a:pt x="544068" y="1121969"/>
-                </a:lnTo>
-                <a:lnTo>
-                  <a:pt x="437998" y="1082650"/>
-                </a:lnTo>
-                <a:lnTo>
-                  <a:pt x="339242" y="1033272"/>
-                </a:lnTo>
-                <a:lnTo>
-                  <a:pt x="251460" y="974750"/>
-                </a:lnTo>
-                <a:lnTo>
-                  <a:pt x="174650" y="908914"/>
-                </a:lnTo>
-                <a:lnTo>
-                  <a:pt x="109728" y="834847"/>
-                </a:lnTo>
-                <a:lnTo>
-                  <a:pt x="60350" y="756209"/>
-                </a:lnTo>
-                <a:lnTo>
-                  <a:pt x="24689" y="672998"/>
-                </a:lnTo>
-                <a:lnTo>
-                  <a:pt x="4572" y="587045"/>
-                </a:lnTo>
-                <a:lnTo>
-                  <a:pt x="0" y="499262"/>
-                </a:lnTo>
-                <a:lnTo>
-                  <a:pt x="11887" y="412394"/>
-                </a:lnTo>
-                <a:lnTo>
-                  <a:pt x="39319" y="327355"/>
-                </a:lnTo>
-                <a:lnTo>
-                  <a:pt x="82296" y="245974"/>
-                </a:lnTo>
-                <a:lnTo>
-                  <a:pt x="138989" y="170078"/>
-                </a:lnTo>
-                <a:lnTo>
-                  <a:pt x="209398" y="99670"/>
+                  <a:pt x="277063" y="31090"/>
+                </a:lnTo>
+                <a:lnTo>
+                  <a:pt x="332842" y="25603"/>
+                </a:lnTo>
+                <a:lnTo>
+                  <a:pt x="388620" y="21031"/>
+                </a:lnTo>
+                <a:lnTo>
+                  <a:pt x="444398" y="16459"/>
+                </a:lnTo>
+                <a:lnTo>
+                  <a:pt x="500177" y="12802"/>
+                </a:lnTo>
+                <a:lnTo>
+                  <a:pt x="555955" y="9144"/>
+                </a:lnTo>
+                <a:lnTo>
+                  <a:pt x="611734" y="6401"/>
+                </a:lnTo>
+                <a:lnTo>
+                  <a:pt x="667512" y="4572"/>
+                </a:lnTo>
+                <a:lnTo>
+                  <a:pt x="723290" y="2743"/>
+                </a:lnTo>
+                <a:lnTo>
+                  <a:pt x="779069" y="914"/>
+                </a:lnTo>
+                <a:lnTo>
+                  <a:pt x="834847" y="0"/>
+                </a:lnTo>
+                <a:lnTo>
+                  <a:pt x="890626" y="0"/>
+                </a:lnTo>
+                <a:lnTo>
+                  <a:pt x="946404" y="0"/>
+                </a:lnTo>
+                <a:lnTo>
+                  <a:pt x="1002182" y="914"/>
+                </a:lnTo>
+                <a:lnTo>
+                  <a:pt x="1057961" y="2743"/>
+                </a:lnTo>
+                <a:lnTo>
+                  <a:pt x="1113739" y="4572"/>
+                </a:lnTo>
+                <a:lnTo>
+                  <a:pt x="1169518" y="6401"/>
+                </a:lnTo>
+                <a:lnTo>
+                  <a:pt x="1225296" y="9144"/>
+                </a:lnTo>
+                <a:lnTo>
+                  <a:pt x="1281074" y="12802"/>
+                </a:lnTo>
+                <a:lnTo>
+                  <a:pt x="1336853" y="16459"/>
+                </a:lnTo>
+                <a:lnTo>
+                  <a:pt x="1392631" y="21031"/>
+                </a:lnTo>
+                <a:lnTo>
+                  <a:pt x="1448410" y="25603"/>
+                </a:lnTo>
+                <a:lnTo>
+                  <a:pt x="1504188" y="31090"/>
+                </a:lnTo>
+                <a:lnTo>
+                  <a:pt x="1559966" y="36576"/>
+                </a:lnTo>
+                <a:lnTo>
+                  <a:pt x="1629461" y="102413"/>
+                </a:lnTo>
+                <a:lnTo>
+                  <a:pt x="1687068" y="174650"/>
+                </a:lnTo>
+                <a:lnTo>
+                  <a:pt x="1731874" y="250546"/>
+                </a:lnTo>
+                <a:lnTo>
+                  <a:pt x="1762049" y="331013"/>
+                </a:lnTo>
+                <a:lnTo>
+                  <a:pt x="1779422" y="413309"/>
+                </a:lnTo>
+                <a:lnTo>
+                  <a:pt x="1781251" y="496519"/>
+                </a:lnTo>
+                <a:lnTo>
+                  <a:pt x="1769364" y="578815"/>
+                </a:lnTo>
+                <a:lnTo>
+                  <a:pt x="1742846" y="660197"/>
+                </a:lnTo>
+                <a:lnTo>
+                  <a:pt x="1702613" y="737921"/>
+                </a:lnTo>
+                <a:lnTo>
+                  <a:pt x="1649578" y="811073"/>
+                </a:lnTo>
+                <a:lnTo>
+                  <a:pt x="1583741" y="878738"/>
+                </a:lnTo>
+                <a:lnTo>
+                  <a:pt x="1506931" y="940003"/>
+                </a:lnTo>
+                <a:lnTo>
+                  <a:pt x="1420978" y="993953"/>
+                </a:lnTo>
+                <a:lnTo>
+                  <a:pt x="1324966" y="1038758"/>
+                </a:lnTo>
+                <a:lnTo>
+                  <a:pt x="1222553" y="1074420"/>
+                </a:lnTo>
+                <a:lnTo>
+                  <a:pt x="1115568" y="1100938"/>
+                </a:lnTo>
+                <a:lnTo>
+                  <a:pt x="1004011" y="1116482"/>
+                </a:lnTo>
+                <a:lnTo>
+                  <a:pt x="890626" y="1121969"/>
+                </a:lnTo>
+                <a:lnTo>
+                  <a:pt x="777240" y="1116482"/>
+                </a:lnTo>
+                <a:lnTo>
+                  <a:pt x="665683" y="1100938"/>
+                </a:lnTo>
+                <a:lnTo>
+                  <a:pt x="558698" y="1074420"/>
+                </a:lnTo>
+                <a:lnTo>
+                  <a:pt x="456286" y="1038758"/>
+                </a:lnTo>
+                <a:lnTo>
+                  <a:pt x="360274" y="993953"/>
+                </a:lnTo>
+                <a:lnTo>
+                  <a:pt x="274320" y="940003"/>
+                </a:lnTo>
+                <a:lnTo>
+                  <a:pt x="197510" y="878738"/>
+                </a:lnTo>
+                <a:lnTo>
+                  <a:pt x="131674" y="811073"/>
+                </a:lnTo>
+                <a:lnTo>
+                  <a:pt x="78638" y="737921"/>
+                </a:lnTo>
+                <a:lnTo>
+                  <a:pt x="38405" y="660197"/>
+                </a:lnTo>
+                <a:lnTo>
+                  <a:pt x="11887" y="578815"/>
+                </a:lnTo>
+                <a:lnTo>
+                  <a:pt x="0" y="496519"/>
+                </a:lnTo>
+                <a:lnTo>
+                  <a:pt x="1829" y="413309"/>
+                </a:lnTo>
+                <a:lnTo>
+                  <a:pt x="19202" y="331013"/>
+                </a:lnTo>
+                <a:lnTo>
+                  <a:pt x="49378" y="250546"/>
+                </a:lnTo>
+                <a:lnTo>
+                  <a:pt x="94183" y="174650"/>
+                </a:lnTo>
+                <a:lnTo>
+                  <a:pt x="151790" y="102413"/>
                 </a:lnTo>
                 <a:close/>
               </a:path>
@@ -10648,7 +11108,7 @@
       </p:sp>
       <p:sp>
         <p:nvSpPr>
-          <p:cNvPr id="39" name="Shape 37"/>
+          <p:cNvPr id="43" name="Shape 41"/>
           <p:cNvSpPr/>
           <p:nvPr/>
         </p:nvSpPr>
@@ -10896,7 +11356,7 @@
       </p:sp>
       <p:sp>
         <p:nvSpPr>
-          <p:cNvPr id="40" name="Shape 38"/>
+          <p:cNvPr id="44" name="Shape 42"/>
           <p:cNvSpPr/>
           <p:nvPr/>
         </p:nvSpPr>
@@ -10918,7 +11378,7 @@
       </p:sp>
       <p:sp>
         <p:nvSpPr>
-          <p:cNvPr id="41" name="Text 39"/>
+          <p:cNvPr id="45" name="Text 43"/>
           <p:cNvSpPr txBox="1"/>
           <p:nvPr/>
         </p:nvSpPr>
@@ -10957,7 +11417,7 @@
       </p:sp>
       <p:sp>
         <p:nvSpPr>
-          <p:cNvPr id="42" name="Text 40"/>
+          <p:cNvPr id="46" name="Text 44"/>
           <p:cNvSpPr txBox="1"/>
           <p:nvPr/>
         </p:nvSpPr>
@@ -11039,7 +11499,7 @@
       </p:sp>
       <p:sp>
         <p:nvSpPr>
-          <p:cNvPr id="43" name="Text 41"/>
+          <p:cNvPr id="47" name="Text 45"/>
           <p:cNvSpPr txBox="1"/>
           <p:nvPr/>
         </p:nvSpPr>
